--- a/docs/pitch/leash-deck.pptx
+++ b/docs/pitch/leash-deck.pptx
@@ -778,7 +778,7 @@
           <a:p>
             <a:r>
               <a:rPr lang="en-US" dirty="0"/>
-              <a:t>We keep building through Colosseum. The order is: finish the owner's side, make every alert actionable from a link, and only then go to mainnet, after an audit.</a:t>
+              <a:t>We keep building through Colosseum. The order is: finish the owner's side in the web app, put the wallet one tap from every alert, and only then go to mainnet, after an audit.</a:t>
             </a:r>
             <a:endParaRPr lang="en-US" dirty="0"/>
           </a:p>
@@ -1307,7 +1307,7 @@
             <a:r>
               <a:rPr lang="en-US" dirty="0"/>
               <a:t>The agent reads a buying guide with a hidden instruction: tip twenty-five dollars to a stranger. In this run we script the agent to fall for it, and the screen says so, because we want to show what happens when the model is fooled. It tries three times: three blocks, three strikes, and the agent freezes itself, on-chain. The model was fooled. The money wasn't moved.
-If something fails live: approve with the web app or pnpm owner:approve; unfreeze with the web app or pnpm owner:unfreeze (it also clears leftover strikes). Run the 'Before each take' checklist in apps/agent-demo/README.md before every take.</a:t>
+If something fails live: approve from the Blink in the owner's wallet, the web app or pnpm owner:approve; unfreeze with the web app or pnpm owner:unfreeze (it also clears leftover strikes). Run the 'Before each take' checklist in apps/agent-demo/README.md before every take.</a:t>
             </a:r>
             <a:endParaRPr lang="en-US" dirty="0"/>
           </a:p>
@@ -4331,7 +4331,7 @@
                 <a:ea typeface="Arial" pitchFamily="34" charset="-122"/>
                 <a:cs typeface="Arial" pitchFamily="34" charset="-120"/>
               </a:rPr>
-              <a:t>The demo on devnet</a:t>
+              <a:t>The demo on devnet, and its recording</a:t>
             </a:r>
             <a:endParaRPr lang="en-US" sz="1150" dirty="0"/>
           </a:p>
@@ -4373,7 +4373,7 @@
                 <a:ea typeface="Arial" pitchFamily="34" charset="-122"/>
                 <a:cs typeface="Arial" pitchFamily="34" charset="-120"/>
               </a:rPr>
-              <a:t>Telegram alerts</a:t>
+              <a:t>Telegram alerts checked on a real phone</a:t>
             </a:r>
             <a:endParaRPr lang="en-US" sz="1150" dirty="0"/>
           </a:p>
@@ -4514,28 +4514,7 @@
                 <a:ea typeface="Arial" pitchFamily="34" charset="-122"/>
                 <a:cs typeface="Arial" pitchFamily="34" charset="-120"/>
               </a:rPr>
-              <a:t>Solana Action links to freeze or approve from anywhere</a:t>
-            </a:r>
-            <a:endParaRPr lang="en-US" sz="1150" dirty="0"/>
-          </a:p>
-          <a:p>
-            <a:pPr marL="177800" indent="-177800">
-              <a:spcAft>
-                <a:spcPts val="600"/>
-              </a:spcAft>
-              <a:buSzPct val="100000"/>
-              <a:buChar char="•"/>
-            </a:pPr>
-            <a:r>
-              <a:rPr lang="en-US" sz="1150" dirty="0">
-                <a:solidFill>
-                  <a:srgbClr val="0F1419"/>
-                </a:solidFill>
-                <a:latin typeface="Arial" pitchFamily="34" charset="0"/>
-                <a:ea typeface="Arial" pitchFamily="34" charset="-122"/>
-                <a:cs typeface="Arial" pitchFamily="34" charset="-120"/>
-              </a:rPr>
-              <a:t>The guardian freezes an agent by itself when Sentinel sees an attack</a:t>
+              <a:t>Telegram buttons that open the owner's wallet directly</a:t>
             </a:r>
             <a:endParaRPr lang="en-US" sz="1150" dirty="0"/>
           </a:p>
@@ -11003,7 +10982,7 @@
         </p:blipFill>
         <p:spPr>
           <a:xfrm>
-            <a:off x="548640" y="1499616"/>
+            <a:off x="548640" y="1481328"/>
             <a:ext cx="201168" cy="201168"/>
           </a:xfrm>
           <a:prstGeom prst="rect">
@@ -11019,8 +10998,8 @@
         </p:nvSpPr>
         <p:spPr>
           <a:xfrm>
-            <a:off x="868680" y="1481328"/>
-            <a:ext cx="4480560" cy="274320"/>
+            <a:off x="868680" y="1463040"/>
+            <a:ext cx="4663440" cy="246888"/>
           </a:xfrm>
           <a:prstGeom prst="rect">
             <a:avLst/>
@@ -11066,7 +11045,7 @@
         </p:blipFill>
         <p:spPr>
           <a:xfrm>
-            <a:off x="548640" y="1883664"/>
+            <a:off x="548640" y="1801368"/>
             <a:ext cx="201168" cy="201168"/>
           </a:xfrm>
           <a:prstGeom prst="rect">
@@ -11082,8 +11061,8 @@
         </p:nvSpPr>
         <p:spPr>
           <a:xfrm>
-            <a:off x="868680" y="1865376"/>
-            <a:ext cx="4480560" cy="548640"/>
+            <a:off x="868680" y="1783080"/>
+            <a:ext cx="4663440" cy="246888"/>
           </a:xfrm>
           <a:prstGeom prst="rect">
             <a:avLst/>
@@ -11107,7 +11086,7 @@
                 <a:ea typeface="Arial" pitchFamily="34" charset="-122"/>
                 <a:cs typeface="Arial" pitchFamily="34" charset="-120"/>
               </a:rPr>
-              <a:t>60 policy test cases give the same result in TypeScript, in Rust, and in LiteSVM on the exact program binary deployed on devnet (checked byte for byte)</a:t>
+              <a:t>60 policy cases agree in TypeScript, in Rust and on the deployed binary</a:t>
             </a:r>
             <a:endParaRPr lang="en-US" sz="1150" dirty="0"/>
           </a:p>
@@ -11129,7 +11108,7 @@
         </p:blipFill>
         <p:spPr>
           <a:xfrm>
-            <a:off x="548640" y="2542032"/>
+            <a:off x="548640" y="2121408"/>
             <a:ext cx="201168" cy="201168"/>
           </a:xfrm>
           <a:prstGeom prst="rect">
@@ -11145,8 +11124,8 @@
         </p:nvSpPr>
         <p:spPr>
           <a:xfrm>
-            <a:off x="868680" y="2523744"/>
-            <a:ext cx="4480560" cy="274320"/>
+            <a:off x="868680" y="2103120"/>
+            <a:ext cx="4663440" cy="246888"/>
           </a:xfrm>
           <a:prstGeom prst="rect">
             <a:avLst/>
@@ -11192,7 +11171,7 @@
         </p:blipFill>
         <p:spPr>
           <a:xfrm>
-            <a:off x="548640" y="2926080"/>
+            <a:off x="548640" y="2441448"/>
             <a:ext cx="201168" cy="201168"/>
           </a:xfrm>
           <a:prstGeom prst="rect">
@@ -11208,8 +11187,8 @@
         </p:nvSpPr>
         <p:spPr>
           <a:xfrm>
-            <a:off x="868680" y="2907792"/>
-            <a:ext cx="4480560" cy="274320"/>
+            <a:off x="868680" y="2423160"/>
+            <a:ext cx="4663440" cy="246888"/>
           </a:xfrm>
           <a:prstGeom prst="rect">
             <a:avLst/>
@@ -11255,7 +11234,7 @@
         </p:blipFill>
         <p:spPr>
           <a:xfrm>
-            <a:off x="548640" y="3310128"/>
+            <a:off x="548640" y="2761488"/>
             <a:ext cx="201168" cy="201168"/>
           </a:xfrm>
           <a:prstGeom prst="rect">
@@ -11271,8 +11250,8 @@
         </p:nvSpPr>
         <p:spPr>
           <a:xfrm>
-            <a:off x="868680" y="3291840"/>
-            <a:ext cx="4480560" cy="274320"/>
+            <a:off x="868680" y="2743200"/>
+            <a:ext cx="4663440" cy="246888"/>
           </a:xfrm>
           <a:prstGeom prst="rect">
             <a:avLst/>
@@ -11296,7 +11275,7 @@
                 <a:ea typeface="Arial" pitchFamily="34" charset="-122"/>
                 <a:cs typeface="Arial" pitchFamily="34" charset="-120"/>
               </a:rPr>
-              <a:t>The whole demo story, end to end on a local Solana validator</a:t>
+              <a:t>The whole story: on a local validator, and in one test on every commit</a:t>
             </a:r>
             <a:endParaRPr lang="en-US" sz="1150" dirty="0"/>
           </a:p>
@@ -11318,7 +11297,7 @@
         </p:blipFill>
         <p:spPr>
           <a:xfrm>
-            <a:off x="548640" y="3694176"/>
+            <a:off x="548640" y="3081528"/>
             <a:ext cx="201168" cy="201168"/>
           </a:xfrm>
           <a:prstGeom prst="rect">
@@ -11334,8 +11313,8 @@
         </p:nvSpPr>
         <p:spPr>
           <a:xfrm>
-            <a:off x="868680" y="3675888"/>
-            <a:ext cx="4480560" cy="274320"/>
+            <a:off x="868680" y="3063240"/>
+            <a:ext cx="4663440" cy="246888"/>
           </a:xfrm>
           <a:prstGeom prst="rect">
             <a:avLst/>
@@ -11364,32 +11343,10 @@
             <a:endParaRPr lang="en-US" sz="1150" dirty="0"/>
           </a:p>
         </p:txBody>
-      </p:sp>
-      <p:sp>
-        <p:nvSpPr>
-          <p:cNvPr id="20" name="Shape 11"/>
-          <p:cNvSpPr/>
-          <p:nvPr/>
-        </p:nvSpPr>
-        <p:spPr>
-          <a:xfrm>
-            <a:off x="5669280" y="1051560"/>
-            <a:ext cx="1325880" cy="292608"/>
-          </a:xfrm>
-          <a:prstGeom prst="roundRect">
-            <a:avLst>
-              <a:gd name="adj" fmla="val 312500"/>
-            </a:avLst>
-          </a:prstGeom>
-          <a:solidFill>
-            <a:srgbClr val="F8EEE6"/>
-          </a:solidFill>
-          <a:ln/>
-        </p:spPr>
       </p:sp>
       <p:pic>
         <p:nvPicPr>
-          <p:cNvPr id="21" name="Image 7" descr="preencoded.png">    </p:cNvPr>
+          <p:cNvPr id="20" name="Image 7" descr="preencoded.png">    </p:cNvPr>
           <p:cNvPicPr>
             <a:picLocks noChangeAspect="1"/>
           </p:cNvPicPr>
@@ -11403,8 +11360,8 @@
         </p:blipFill>
         <p:spPr>
           <a:xfrm>
-            <a:off x="5762915" y="1115934"/>
-            <a:ext cx="163860" cy="163860"/>
+            <a:off x="548640" y="3401568"/>
+            <a:ext cx="201168" cy="201168"/>
           </a:xfrm>
           <a:prstGeom prst="rect">
             <a:avLst/>
@@ -11413,46 +11370,46 @@
       </p:pic>
       <p:sp>
         <p:nvSpPr>
-          <p:cNvPr id="22" name="Text 12"/>
-          <p:cNvSpPr txBox="1"/>
-          <p:nvPr/>
-        </p:nvSpPr>
-        <p:spPr>
-          <a:xfrm>
-            <a:off x="5981639" y="1051560"/>
-            <a:ext cx="958657" cy="292608"/>
-          </a:xfrm>
-          <a:prstGeom prst="rect">
-            <a:avLst/>
-          </a:prstGeom>
-          <a:noFill/>
-          <a:ln/>
-        </p:spPr>
-        <p:txBody>
-          <a:bodyPr wrap="square" lIns="0" tIns="0" rIns="0" bIns="0" rtlCol="0" anchor="ctr"/>
+          <p:cNvPr id="21" name="Text 11"/>
+          <p:cNvSpPr txBox="1"/>
+          <p:nvPr/>
+        </p:nvSpPr>
+        <p:spPr>
+          <a:xfrm>
+            <a:off x="868680" y="3383280"/>
+            <a:ext cx="4663440" cy="246888"/>
+          </a:xfrm>
+          <a:prstGeom prst="rect">
+            <a:avLst/>
+          </a:prstGeom>
+          <a:noFill/>
+          <a:ln/>
+        </p:spPr>
+        <p:txBody>
+          <a:bodyPr wrap="square" lIns="0" tIns="0" rIns="0" bIns="0" rtlCol="0" anchor="t"/>
           <a:lstStyle/>
           <a:p>
             <a:pPr algn="l" indent="0" marL="0">
               <a:buNone/>
             </a:pPr>
             <a:r>
-              <a:rPr lang="en-US" sz="1050" b="1" dirty="0">
-                <a:solidFill>
-                  <a:srgbClr val="B45309"/>
-                </a:solidFill>
-                <a:latin typeface="Arial" pitchFamily="34" charset="0"/>
-                <a:ea typeface="Arial" pitchFamily="34" charset="-122"/>
-                <a:cs typeface="Arial" pitchFamily="34" charset="-120"/>
-              </a:rPr>
-              <a:t>In progress</a:t>
-            </a:r>
-            <a:endParaRPr lang="en-US" sz="1050" dirty="0"/>
+              <a:rPr lang="en-US" sz="1150" dirty="0">
+                <a:solidFill>
+                  <a:srgbClr val="0F1419"/>
+                </a:solidFill>
+                <a:latin typeface="Arial" pitchFamily="34" charset="0"/>
+                <a:ea typeface="Arial" pitchFamily="34" charset="-122"/>
+                <a:cs typeface="Arial" pitchFamily="34" charset="-120"/>
+              </a:rPr>
+              <a:t>Sentinel's alerts, and the guardian's autofreeze</a:t>
+            </a:r>
+            <a:endParaRPr lang="en-US" sz="1150" dirty="0"/>
           </a:p>
         </p:txBody>
       </p:sp>
       <p:pic>
         <p:nvPicPr>
-          <p:cNvPr id="23" name="Image 8" descr="preencoded.png">    </p:cNvPr>
+          <p:cNvPr id="22" name="Image 8" descr="preencoded.png">    </p:cNvPr>
           <p:cNvPicPr>
             <a:picLocks noChangeAspect="1"/>
           </p:cNvPicPr>
@@ -11466,8 +11423,8 @@
         </p:blipFill>
         <p:spPr>
           <a:xfrm>
-            <a:off x="5669280" y="1499616"/>
-            <a:ext cx="182880" cy="182880"/>
+            <a:off x="548640" y="3721608"/>
+            <a:ext cx="201168" cy="201168"/>
           </a:xfrm>
           <a:prstGeom prst="rect">
             <a:avLst/>
@@ -11476,14 +11433,14 @@
       </p:pic>
       <p:sp>
         <p:nvSpPr>
-          <p:cNvPr id="24" name="Text 13"/>
-          <p:cNvSpPr txBox="1"/>
-          <p:nvPr/>
-        </p:nvSpPr>
-        <p:spPr>
-          <a:xfrm>
-            <a:off x="5961888" y="1481328"/>
-            <a:ext cx="2606040" cy="384048"/>
+          <p:cNvPr id="23" name="Text 12"/>
+          <p:cNvSpPr txBox="1"/>
+          <p:nvPr/>
+        </p:nvSpPr>
+        <p:spPr>
+          <a:xfrm>
+            <a:off x="868680" y="3703320"/>
+            <a:ext cx="4663440" cy="246888"/>
           </a:xfrm>
           <a:prstGeom prst="rect">
             <a:avLst/>
@@ -11507,7 +11464,7 @@
                 <a:ea typeface="Arial" pitchFamily="34" charset="-122"/>
                 <a:cs typeface="Arial" pitchFamily="34" charset="-120"/>
               </a:rPr>
-              <a:t>Pairing, approve, freeze and unfreeze in the web app</a:t>
+              <a:t>Solana Actions (Blinks): approve or freeze from a link</a:t>
             </a:r>
             <a:endParaRPr lang="en-US" sz="1150" dirty="0"/>
           </a:p>
@@ -11515,7 +11472,7 @@
       </p:sp>
       <p:pic>
         <p:nvPicPr>
-          <p:cNvPr id="25" name="Image 9" descr="preencoded.png">    </p:cNvPr>
+          <p:cNvPr id="24" name="Image 9" descr="preencoded.png">    </p:cNvPr>
           <p:cNvPicPr>
             <a:picLocks noChangeAspect="1"/>
           </p:cNvPicPr>
@@ -11529,8 +11486,8 @@
         </p:blipFill>
         <p:spPr>
           <a:xfrm>
-            <a:off x="5669280" y="2011680"/>
-            <a:ext cx="182880" cy="182880"/>
+            <a:off x="548640" y="4041648"/>
+            <a:ext cx="201168" cy="201168"/>
           </a:xfrm>
           <a:prstGeom prst="rect">
             <a:avLst/>
@@ -11539,14 +11496,14 @@
       </p:pic>
       <p:sp>
         <p:nvSpPr>
-          <p:cNvPr id="26" name="Text 14"/>
-          <p:cNvSpPr txBox="1"/>
-          <p:nvPr/>
-        </p:nvSpPr>
-        <p:spPr>
-          <a:xfrm>
-            <a:off x="5961888" y="1993392"/>
-            <a:ext cx="2606040" cy="201168"/>
+          <p:cNvPr id="25" name="Text 13"/>
+          <p:cNvSpPr txBox="1"/>
+          <p:nvPr/>
+        </p:nvSpPr>
+        <p:spPr>
+          <a:xfrm>
+            <a:off x="868680" y="4023360"/>
+            <a:ext cx="4663440" cy="246888"/>
           </a:xfrm>
           <a:prstGeom prst="rect">
             <a:avLst/>
@@ -11570,11 +11527,33 @@
                 <a:ea typeface="Arial" pitchFamily="34" charset="-122"/>
                 <a:cs typeface="Arial" pitchFamily="34" charset="-120"/>
               </a:rPr>
-              <a:t>Telegram alerts</a:t>
+              <a:t>A security CI job runs the invariant tests by name</a:t>
             </a:r>
             <a:endParaRPr lang="en-US" sz="1150" dirty="0"/>
           </a:p>
         </p:txBody>
+      </p:sp>
+      <p:sp>
+        <p:nvSpPr>
+          <p:cNvPr id="26" name="Shape 14"/>
+          <p:cNvSpPr/>
+          <p:nvPr/>
+        </p:nvSpPr>
+        <p:spPr>
+          <a:xfrm>
+            <a:off x="5669280" y="1051560"/>
+            <a:ext cx="1325880" cy="292608"/>
+          </a:xfrm>
+          <a:prstGeom prst="roundRect">
+            <a:avLst>
+              <a:gd name="adj" fmla="val 312500"/>
+            </a:avLst>
+          </a:prstGeom>
+          <a:solidFill>
+            <a:srgbClr val="F8EEE6"/>
+          </a:solidFill>
+          <a:ln/>
+        </p:spPr>
       </p:sp>
       <p:pic>
         <p:nvPicPr>
@@ -11592,7 +11571,70 @@
         </p:blipFill>
         <p:spPr>
           <a:xfrm>
-            <a:off x="5669280" y="2340864"/>
+            <a:off x="5762915" y="1115934"/>
+            <a:ext cx="163860" cy="163860"/>
+          </a:xfrm>
+          <a:prstGeom prst="rect">
+            <a:avLst/>
+          </a:prstGeom>
+        </p:spPr>
+      </p:pic>
+      <p:sp>
+        <p:nvSpPr>
+          <p:cNvPr id="28" name="Text 15"/>
+          <p:cNvSpPr txBox="1"/>
+          <p:nvPr/>
+        </p:nvSpPr>
+        <p:spPr>
+          <a:xfrm>
+            <a:off x="5981639" y="1051560"/>
+            <a:ext cx="958657" cy="292608"/>
+          </a:xfrm>
+          <a:prstGeom prst="rect">
+            <a:avLst/>
+          </a:prstGeom>
+          <a:noFill/>
+          <a:ln/>
+        </p:spPr>
+        <p:txBody>
+          <a:bodyPr wrap="square" lIns="0" tIns="0" rIns="0" bIns="0" rtlCol="0" anchor="ctr"/>
+          <a:lstStyle/>
+          <a:p>
+            <a:pPr algn="l" indent="0" marL="0">
+              <a:buNone/>
+            </a:pPr>
+            <a:r>
+              <a:rPr lang="en-US" sz="1050" b="1" dirty="0">
+                <a:solidFill>
+                  <a:srgbClr val="B45309"/>
+                </a:solidFill>
+                <a:latin typeface="Arial" pitchFamily="34" charset="0"/>
+                <a:ea typeface="Arial" pitchFamily="34" charset="-122"/>
+                <a:cs typeface="Arial" pitchFamily="34" charset="-120"/>
+              </a:rPr>
+              <a:t>In progress</a:t>
+            </a:r>
+            <a:endParaRPr lang="en-US" sz="1050" dirty="0"/>
+          </a:p>
+        </p:txBody>
+      </p:sp>
+      <p:pic>
+        <p:nvPicPr>
+          <p:cNvPr id="29" name="Image 11" descr="preencoded.png">    </p:cNvPr>
+          <p:cNvPicPr>
+            <a:picLocks noChangeAspect="1"/>
+          </p:cNvPicPr>
+          <p:nvPr/>
+        </p:nvPicPr>
+        <p:blipFill>
+          <a:blip r:embed="rId12"/>
+          <a:stretch>
+            <a:fillRect/>
+          </a:stretch>
+        </p:blipFill>
+        <p:spPr>
+          <a:xfrm>
+            <a:off x="5669280" y="1499616"/>
             <a:ext cx="182880" cy="182880"/>
           </a:xfrm>
           <a:prstGeom prst="rect">
@@ -11602,13 +11644,13 @@
       </p:pic>
       <p:sp>
         <p:nvSpPr>
-          <p:cNvPr id="28" name="Text 15"/>
-          <p:cNvSpPr txBox="1"/>
-          <p:nvPr/>
-        </p:nvSpPr>
-        <p:spPr>
-          <a:xfrm>
-            <a:off x="5961888" y="2322576"/>
+          <p:cNvPr id="30" name="Text 16"/>
+          <p:cNvSpPr txBox="1"/>
+          <p:nvPr/>
+        </p:nvSpPr>
+        <p:spPr>
+          <a:xfrm>
+            <a:off x="5961888" y="1481328"/>
             <a:ext cx="2606040" cy="384048"/>
           </a:xfrm>
           <a:prstGeom prst="rect">
@@ -11633,15 +11675,141 @@
                 <a:ea typeface="Arial" pitchFamily="34" charset="-122"/>
                 <a:cs typeface="Arial" pitchFamily="34" charset="-120"/>
               </a:rPr>
+              <a:t>Pairing, approve, freeze and unfreeze in the web app</a:t>
+            </a:r>
+            <a:endParaRPr lang="en-US" sz="1150" dirty="0"/>
+          </a:p>
+        </p:txBody>
+      </p:sp>
+      <p:pic>
+        <p:nvPicPr>
+          <p:cNvPr id="31" name="Image 12" descr="preencoded.png">    </p:cNvPr>
+          <p:cNvPicPr>
+            <a:picLocks noChangeAspect="1"/>
+          </p:cNvPicPr>
+          <p:nvPr/>
+        </p:nvPicPr>
+        <p:blipFill>
+          <a:blip r:embed="rId13"/>
+          <a:stretch>
+            <a:fillRect/>
+          </a:stretch>
+        </p:blipFill>
+        <p:spPr>
+          <a:xfrm>
+            <a:off x="5669280" y="2011680"/>
+            <a:ext cx="182880" cy="182880"/>
+          </a:xfrm>
+          <a:prstGeom prst="rect">
+            <a:avLst/>
+          </a:prstGeom>
+        </p:spPr>
+      </p:pic>
+      <p:sp>
+        <p:nvSpPr>
+          <p:cNvPr id="32" name="Text 17"/>
+          <p:cNvSpPr txBox="1"/>
+          <p:nvPr/>
+        </p:nvSpPr>
+        <p:spPr>
+          <a:xfrm>
+            <a:off x="5961888" y="1993392"/>
+            <a:ext cx="2606040" cy="384048"/>
+          </a:xfrm>
+          <a:prstGeom prst="rect">
+            <a:avLst/>
+          </a:prstGeom>
+          <a:noFill/>
+          <a:ln/>
+        </p:spPr>
+        <p:txBody>
+          <a:bodyPr wrap="square" lIns="0" tIns="0" rIns="0" bIns="0" rtlCol="0" anchor="t"/>
+          <a:lstStyle/>
+          <a:p>
+            <a:pPr algn="l" indent="0" marL="0">
+              <a:buNone/>
+            </a:pPr>
+            <a:r>
+              <a:rPr lang="en-US" sz="1150" dirty="0">
+                <a:solidFill>
+                  <a:srgbClr val="0F1419"/>
+                </a:solidFill>
+                <a:latin typeface="Arial" pitchFamily="34" charset="0"/>
+                <a:ea typeface="Arial" pitchFamily="34" charset="-122"/>
+                <a:cs typeface="Arial" pitchFamily="34" charset="-120"/>
+              </a:rPr>
               <a:t>The full demo on devnet, and its recording</a:t>
             </a:r>
             <a:endParaRPr lang="en-US" sz="1150" dirty="0"/>
           </a:p>
         </p:txBody>
       </p:sp>
-      <p:sp>
-        <p:nvSpPr>
-          <p:cNvPr id="29" name="Shape 16"/>
+      <p:pic>
+        <p:nvPicPr>
+          <p:cNvPr id="33" name="Image 13" descr="preencoded.png">    </p:cNvPr>
+          <p:cNvPicPr>
+            <a:picLocks noChangeAspect="1"/>
+          </p:cNvPicPr>
+          <p:nvPr/>
+        </p:nvPicPr>
+        <p:blipFill>
+          <a:blip r:embed="rId14"/>
+          <a:stretch>
+            <a:fillRect/>
+          </a:stretch>
+        </p:blipFill>
+        <p:spPr>
+          <a:xfrm>
+            <a:off x="5669280" y="2523744"/>
+            <a:ext cx="182880" cy="182880"/>
+          </a:xfrm>
+          <a:prstGeom prst="rect">
+            <a:avLst/>
+          </a:prstGeom>
+        </p:spPr>
+      </p:pic>
+      <p:sp>
+        <p:nvSpPr>
+          <p:cNvPr id="34" name="Text 18"/>
+          <p:cNvSpPr txBox="1"/>
+          <p:nvPr/>
+        </p:nvSpPr>
+        <p:spPr>
+          <a:xfrm>
+            <a:off x="5961888" y="2505456"/>
+            <a:ext cx="2606040" cy="384048"/>
+          </a:xfrm>
+          <a:prstGeom prst="rect">
+            <a:avLst/>
+          </a:prstGeom>
+          <a:noFill/>
+          <a:ln/>
+        </p:spPr>
+        <p:txBody>
+          <a:bodyPr wrap="square" lIns="0" tIns="0" rIns="0" bIns="0" rtlCol="0" anchor="t"/>
+          <a:lstStyle/>
+          <a:p>
+            <a:pPr algn="l" indent="0" marL="0">
+              <a:buNone/>
+            </a:pPr>
+            <a:r>
+              <a:rPr lang="en-US" sz="1150" dirty="0">
+                <a:solidFill>
+                  <a:srgbClr val="0F1419"/>
+                </a:solidFill>
+                <a:latin typeface="Arial" pitchFamily="34" charset="0"/>
+                <a:ea typeface="Arial" pitchFamily="34" charset="-122"/>
+                <a:cs typeface="Arial" pitchFamily="34" charset="-120"/>
+              </a:rPr>
+              <a:t>Telegram alerts on a real phone (being checked)</a:t>
+            </a:r>
+            <a:endParaRPr lang="en-US" sz="1150" dirty="0"/>
+          </a:p>
+        </p:txBody>
+      </p:sp>
+      <p:sp>
+        <p:nvSpPr>
+          <p:cNvPr id="35" name="Shape 19"/>
           <p:cNvSpPr/>
           <p:nvPr/>
         </p:nvSpPr>
@@ -11675,7 +11843,7 @@
       </p:sp>
       <p:sp>
         <p:nvSpPr>
-          <p:cNvPr id="30" name="Text 17"/>
+          <p:cNvPr id="36" name="Text 20"/>
           <p:cNvSpPr txBox="1"/>
           <p:nvPr/>
         </p:nvSpPr>
@@ -11706,7 +11874,7 @@
                 <a:ea typeface="Arial" pitchFamily="34" charset="-122"/>
                 <a:cs typeface="Arial" pitchFamily="34" charset="-120"/>
               </a:rPr>
-              <a:t>767</a:t>
+              <a:t>911</a:t>
             </a:r>
             <a:endParaRPr lang="en-US" sz="3600" dirty="0"/>
           </a:p>
@@ -11714,7 +11882,7 @@
       </p:sp>
       <p:sp>
         <p:nvSpPr>
-          <p:cNvPr id="31" name="Text 18"/>
+          <p:cNvPr id="37" name="Text 21"/>
           <p:cNvSpPr txBox="1"/>
           <p:nvPr/>
         </p:nvSpPr>
@@ -11753,7 +11921,7 @@
       </p:sp>
       <p:sp>
         <p:nvSpPr>
-          <p:cNvPr id="32" name="Text 19"/>
+          <p:cNvPr id="38" name="Text 22"/>
           <p:cNvSpPr txBox="1"/>
           <p:nvPr/>
         </p:nvSpPr>
@@ -11784,7 +11952,7 @@
                 <a:ea typeface="Arial" pitchFamily="34" charset="-122"/>
                 <a:cs typeface="Arial" pitchFamily="34" charset="-120"/>
               </a:rPr>
-              <a:t>639 TypeScript · 128 Rust</a:t>
+              <a:t>783 TypeScript · 128 Rust</a:t>
             </a:r>
             <a:endParaRPr lang="en-US" sz="1000" dirty="0"/>
           </a:p>

--- a/docs/pitch/leash-deck.pptx
+++ b/docs/pitch/leash-deck.pptx
@@ -778,7 +778,7 @@
           <a:p>
             <a:r>
               <a:rPr lang="en-US" dirty="0"/>
-              <a:t>We keep building through Colosseum. The order is: finish the owner's side in the web app, put the wallet one tap from every alert, and only then go to mainnet, after an audit.</a:t>
+              <a:t>We keep building through Colosseum. The order is: the owner's side on devnet, then put the wallet one tap from every alert, and only then go to mainnet, after an audit.</a:t>
             </a:r>
             <a:endParaRPr lang="en-US" dirty="0"/>
           </a:p>
@@ -1307,7 +1307,7 @@
             <a:r>
               <a:rPr lang="en-US" dirty="0"/>
               <a:t>The agent reads a buying guide with a hidden instruction: tip twenty-five dollars to a stranger. In this run we script the agent to fall for it, and the screen says so, because we want to show what happens when the model is fooled. It tries three times: three blocks, three strikes, and the agent freezes itself, on-chain. The model was fooled. The money wasn't moved.
-If something fails live: approve from the Blink in the owner's wallet, the web app or pnpm owner:approve; unfreeze with the web app or pnpm owner:unfreeze (it also clears leftover strikes). Run the 'Before each take' checklist in apps/agent-demo/README.md before every take.</a:t>
+If something fails live: the owner approves and unfreezes in the web app; if that fails, approve from the Blink in the owner's wallet or with pnpm owner:approve, and unfreeze with pnpm owner:unfreeze (it also clears leftover strikes). Run the 'Before each take' checklist in apps/agent-demo/README.md before every take.</a:t>
             </a:r>
             <a:endParaRPr lang="en-US" dirty="0"/>
           </a:p>
@@ -4352,7 +4352,7 @@
                 <a:ea typeface="Arial" pitchFamily="34" charset="-122"/>
                 <a:cs typeface="Arial" pitchFamily="34" charset="-120"/>
               </a:rPr>
-              <a:t>Pairing, approvals and the off switch in the web app</a:t>
+              <a:t>The web app with a real wallet on devnet</a:t>
             </a:r>
             <a:endParaRPr lang="en-US" sz="1150" dirty="0"/>
           </a:p>
@@ -11275,7 +11275,7 @@
                 <a:ea typeface="Arial" pitchFamily="34" charset="-122"/>
                 <a:cs typeface="Arial" pitchFamily="34" charset="-120"/>
               </a:rPr>
-              <a:t>The whole story: on a local validator, and in one test on every commit</a:t>
+              <a:t>The whole story: on a local validator, in CI, and in one command</a:t>
             </a:r>
             <a:endParaRPr lang="en-US" sz="1150" dirty="0"/>
           </a:p>
@@ -11401,7 +11401,7 @@
                 <a:ea typeface="Arial" pitchFamily="34" charset="-122"/>
                 <a:cs typeface="Arial" pitchFamily="34" charset="-120"/>
               </a:rPr>
-              <a:t>Sentinel's alerts, and the guardian's autofreeze</a:t>
+              <a:t>Pairing, approve, freeze and unfreeze in the web app</a:t>
             </a:r>
             <a:endParaRPr lang="en-US" sz="1150" dirty="0"/>
           </a:p>
@@ -11464,7 +11464,7 @@
                 <a:ea typeface="Arial" pitchFamily="34" charset="-122"/>
                 <a:cs typeface="Arial" pitchFamily="34" charset="-120"/>
               </a:rPr>
-              <a:t>Solana Actions (Blinks): approve or freeze from a link</a:t>
+              <a:t>Sentinel's alerts, and the guardian's autofreeze</a:t>
             </a:r>
             <a:endParaRPr lang="en-US" sz="1150" dirty="0"/>
           </a:p>
@@ -11527,37 +11527,15 @@
                 <a:ea typeface="Arial" pitchFamily="34" charset="-122"/>
                 <a:cs typeface="Arial" pitchFamily="34" charset="-120"/>
               </a:rPr>
-              <a:t>A security CI job runs the invariant tests by name</a:t>
+              <a:t>Solana Actions (Blinks): approve or freeze from a link</a:t>
             </a:r>
             <a:endParaRPr lang="en-US" sz="1150" dirty="0"/>
           </a:p>
         </p:txBody>
-      </p:sp>
-      <p:sp>
-        <p:nvSpPr>
-          <p:cNvPr id="26" name="Shape 14"/>
-          <p:cNvSpPr/>
-          <p:nvPr/>
-        </p:nvSpPr>
-        <p:spPr>
-          <a:xfrm>
-            <a:off x="5669280" y="1051560"/>
-            <a:ext cx="1325880" cy="292608"/>
-          </a:xfrm>
-          <a:prstGeom prst="roundRect">
-            <a:avLst>
-              <a:gd name="adj" fmla="val 312500"/>
-            </a:avLst>
-          </a:prstGeom>
-          <a:solidFill>
-            <a:srgbClr val="F8EEE6"/>
-          </a:solidFill>
-          <a:ln/>
-        </p:spPr>
       </p:sp>
       <p:pic>
         <p:nvPicPr>
-          <p:cNvPr id="27" name="Image 10" descr="preencoded.png">    </p:cNvPr>
+          <p:cNvPr id="26" name="Image 10" descr="preencoded.png">    </p:cNvPr>
           <p:cNvPicPr>
             <a:picLocks noChangeAspect="1"/>
           </p:cNvPicPr>
@@ -11571,8 +11549,8 @@
         </p:blipFill>
         <p:spPr>
           <a:xfrm>
-            <a:off x="5762915" y="1115934"/>
-            <a:ext cx="163860" cy="163860"/>
+            <a:off x="548640" y="4361688"/>
+            <a:ext cx="201168" cy="201168"/>
           </a:xfrm>
           <a:prstGeom prst="rect">
             <a:avLst/>
@@ -11581,42 +11559,64 @@
       </p:pic>
       <p:sp>
         <p:nvSpPr>
-          <p:cNvPr id="28" name="Text 15"/>
-          <p:cNvSpPr txBox="1"/>
-          <p:nvPr/>
-        </p:nvSpPr>
-        <p:spPr>
-          <a:xfrm>
-            <a:off x="5981639" y="1051560"/>
-            <a:ext cx="958657" cy="292608"/>
-          </a:xfrm>
-          <a:prstGeom prst="rect">
-            <a:avLst/>
-          </a:prstGeom>
-          <a:noFill/>
-          <a:ln/>
-        </p:spPr>
-        <p:txBody>
-          <a:bodyPr wrap="square" lIns="0" tIns="0" rIns="0" bIns="0" rtlCol="0" anchor="ctr"/>
+          <p:cNvPr id="27" name="Text 14"/>
+          <p:cNvSpPr txBox="1"/>
+          <p:nvPr/>
+        </p:nvSpPr>
+        <p:spPr>
+          <a:xfrm>
+            <a:off x="868680" y="4343400"/>
+            <a:ext cx="4663440" cy="246888"/>
+          </a:xfrm>
+          <a:prstGeom prst="rect">
+            <a:avLst/>
+          </a:prstGeom>
+          <a:noFill/>
+          <a:ln/>
+        </p:spPr>
+        <p:txBody>
+          <a:bodyPr wrap="square" lIns="0" tIns="0" rIns="0" bIns="0" rtlCol="0" anchor="t"/>
           <a:lstStyle/>
           <a:p>
             <a:pPr algn="l" indent="0" marL="0">
               <a:buNone/>
             </a:pPr>
             <a:r>
-              <a:rPr lang="en-US" sz="1050" b="1" dirty="0">
-                <a:solidFill>
-                  <a:srgbClr val="B45309"/>
-                </a:solidFill>
-                <a:latin typeface="Arial" pitchFamily="34" charset="0"/>
-                <a:ea typeface="Arial" pitchFamily="34" charset="-122"/>
-                <a:cs typeface="Arial" pitchFamily="34" charset="-120"/>
-              </a:rPr>
-              <a:t>In progress</a:t>
-            </a:r>
-            <a:endParaRPr lang="en-US" sz="1050" dirty="0"/>
-          </a:p>
-        </p:txBody>
+              <a:rPr lang="en-US" sz="1150" dirty="0">
+                <a:solidFill>
+                  <a:srgbClr val="0F1419"/>
+                </a:solidFill>
+                <a:latin typeface="Arial" pitchFamily="34" charset="0"/>
+                <a:ea typeface="Arial" pitchFamily="34" charset="-122"/>
+                <a:cs typeface="Arial" pitchFamily="34" charset="-120"/>
+              </a:rPr>
+              <a:t>A security CI job runs the invariant tests by name</a:t>
+            </a:r>
+            <a:endParaRPr lang="en-US" sz="1150" dirty="0"/>
+          </a:p>
+        </p:txBody>
+      </p:sp>
+      <p:sp>
+        <p:nvSpPr>
+          <p:cNvPr id="28" name="Shape 15"/>
+          <p:cNvSpPr/>
+          <p:nvPr/>
+        </p:nvSpPr>
+        <p:spPr>
+          <a:xfrm>
+            <a:off x="5669280" y="1051560"/>
+            <a:ext cx="1325880" cy="292608"/>
+          </a:xfrm>
+          <a:prstGeom prst="roundRect">
+            <a:avLst>
+              <a:gd name="adj" fmla="val 312500"/>
+            </a:avLst>
+          </a:prstGeom>
+          <a:solidFill>
+            <a:srgbClr val="F8EEE6"/>
+          </a:solidFill>
+          <a:ln/>
+        </p:spPr>
       </p:sp>
       <p:pic>
         <p:nvPicPr>
@@ -11634,8 +11634,8 @@
         </p:blipFill>
         <p:spPr>
           <a:xfrm>
-            <a:off x="5669280" y="1499616"/>
-            <a:ext cx="182880" cy="182880"/>
+            <a:off x="5762915" y="1115934"/>
+            <a:ext cx="163860" cy="163860"/>
           </a:xfrm>
           <a:prstGeom prst="rect">
             <a:avLst/>
@@ -11650,34 +11650,34 @@
         </p:nvSpPr>
         <p:spPr>
           <a:xfrm>
-            <a:off x="5961888" y="1481328"/>
-            <a:ext cx="2606040" cy="384048"/>
-          </a:xfrm>
-          <a:prstGeom prst="rect">
-            <a:avLst/>
-          </a:prstGeom>
-          <a:noFill/>
-          <a:ln/>
-        </p:spPr>
-        <p:txBody>
-          <a:bodyPr wrap="square" lIns="0" tIns="0" rIns="0" bIns="0" rtlCol="0" anchor="t"/>
+            <a:off x="5981639" y="1051560"/>
+            <a:ext cx="958657" cy="292608"/>
+          </a:xfrm>
+          <a:prstGeom prst="rect">
+            <a:avLst/>
+          </a:prstGeom>
+          <a:noFill/>
+          <a:ln/>
+        </p:spPr>
+        <p:txBody>
+          <a:bodyPr wrap="square" lIns="0" tIns="0" rIns="0" bIns="0" rtlCol="0" anchor="ctr"/>
           <a:lstStyle/>
           <a:p>
             <a:pPr algn="l" indent="0" marL="0">
               <a:buNone/>
             </a:pPr>
             <a:r>
-              <a:rPr lang="en-US" sz="1150" dirty="0">
-                <a:solidFill>
-                  <a:srgbClr val="0F1419"/>
-                </a:solidFill>
-                <a:latin typeface="Arial" pitchFamily="34" charset="0"/>
-                <a:ea typeface="Arial" pitchFamily="34" charset="-122"/>
-                <a:cs typeface="Arial" pitchFamily="34" charset="-120"/>
-              </a:rPr>
-              <a:t>Pairing, approve, freeze and unfreeze in the web app</a:t>
-            </a:r>
-            <a:endParaRPr lang="en-US" sz="1150" dirty="0"/>
+              <a:rPr lang="en-US" sz="1050" b="1" dirty="0">
+                <a:solidFill>
+                  <a:srgbClr val="B45309"/>
+                </a:solidFill>
+                <a:latin typeface="Arial" pitchFamily="34" charset="0"/>
+                <a:ea typeface="Arial" pitchFamily="34" charset="-122"/>
+                <a:cs typeface="Arial" pitchFamily="34" charset="-120"/>
+              </a:rPr>
+              <a:t>In progress</a:t>
+            </a:r>
+            <a:endParaRPr lang="en-US" sz="1050" dirty="0"/>
           </a:p>
         </p:txBody>
       </p:sp>
@@ -11697,7 +11697,7 @@
         </p:blipFill>
         <p:spPr>
           <a:xfrm>
-            <a:off x="5669280" y="2011680"/>
+            <a:off x="5669280" y="1499616"/>
             <a:ext cx="182880" cy="182880"/>
           </a:xfrm>
           <a:prstGeom prst="rect">
@@ -11713,7 +11713,7 @@
         </p:nvSpPr>
         <p:spPr>
           <a:xfrm>
-            <a:off x="5961888" y="1993392"/>
+            <a:off x="5961888" y="1481328"/>
             <a:ext cx="2606040" cy="384048"/>
           </a:xfrm>
           <a:prstGeom prst="rect">
@@ -11760,7 +11760,7 @@
         </p:blipFill>
         <p:spPr>
           <a:xfrm>
-            <a:off x="5669280" y="2523744"/>
+            <a:off x="5669280" y="2011680"/>
             <a:ext cx="182880" cy="182880"/>
           </a:xfrm>
           <a:prstGeom prst="rect">
@@ -11776,7 +11776,7 @@
         </p:nvSpPr>
         <p:spPr>
           <a:xfrm>
-            <a:off x="5961888" y="2505456"/>
+            <a:off x="5961888" y="1993392"/>
             <a:ext cx="2606040" cy="384048"/>
           </a:xfrm>
           <a:prstGeom prst="rect">
@@ -11874,7 +11874,7 @@
                 <a:ea typeface="Arial" pitchFamily="34" charset="-122"/>
                 <a:cs typeface="Arial" pitchFamily="34" charset="-120"/>
               </a:rPr>
-              <a:t>911</a:t>
+              <a:t>964</a:t>
             </a:r>
             <a:endParaRPr lang="en-US" sz="3600" dirty="0"/>
           </a:p>
@@ -11952,7 +11952,7 @@
                 <a:ea typeface="Arial" pitchFamily="34" charset="-122"/>
                 <a:cs typeface="Arial" pitchFamily="34" charset="-120"/>
               </a:rPr>
-              <a:t>783 TypeScript · 128 Rust</a:t>
+              <a:t>836 TypeScript · 128 Rust</a:t>
             </a:r>
             <a:endParaRPr lang="en-US" sz="1000" dirty="0"/>
           </a:p>

--- a/docs/pitch/leash-deck.pptx
+++ b/docs/pitch/leash-deck.pptx
@@ -4356,27 +4356,6 @@
             </a:r>
             <a:endParaRPr lang="en-US" sz="1150" dirty="0"/>
           </a:p>
-          <a:p>
-            <a:pPr marL="177800" indent="-177800">
-              <a:spcAft>
-                <a:spcPts val="600"/>
-              </a:spcAft>
-              <a:buSzPct val="100000"/>
-              <a:buChar char="•"/>
-            </a:pPr>
-            <a:r>
-              <a:rPr lang="en-US" sz="1150" dirty="0">
-                <a:solidFill>
-                  <a:srgbClr val="0F1419"/>
-                </a:solidFill>
-                <a:latin typeface="Arial" pitchFamily="34" charset="0"/>
-                <a:ea typeface="Arial" pitchFamily="34" charset="-122"/>
-                <a:cs typeface="Arial" pitchFamily="34" charset="-120"/>
-              </a:rPr>
-              <a:t>Telegram alerts checked on a real phone</a:t>
-            </a:r>
-            <a:endParaRPr lang="en-US" sz="1150" dirty="0"/>
-          </a:p>
         </p:txBody>
       </p:sp>
       <p:sp>
@@ -11149,7 +11128,7 @@
                 <a:ea typeface="Arial" pitchFamily="34" charset="-122"/>
                 <a:cs typeface="Arial" pitchFamily="34" charset="-120"/>
               </a:rPr>
-              <a:t>x402 payments through the unmodified official facilitator</a:t>
+              <a:t>x402 payments through the unmodified official facilitator, on devnet too</a:t>
             </a:r>
             <a:endParaRPr lang="en-US" sz="1150" dirty="0"/>
           </a:p>
@@ -11464,7 +11443,7 @@
                 <a:ea typeface="Arial" pitchFamily="34" charset="-122"/>
                 <a:cs typeface="Arial" pitchFamily="34" charset="-120"/>
               </a:rPr>
-              <a:t>Sentinel's alerts, and the guardian's autofreeze</a:t>
+              <a:t>Sentinel's alerts on a real phone, and the guardian's autofreeze</a:t>
             </a:r>
             <a:endParaRPr lang="en-US" sz="1150" dirty="0"/>
           </a:p>
@@ -11744,72 +11723,9 @@
           </a:p>
         </p:txBody>
       </p:sp>
-      <p:pic>
-        <p:nvPicPr>
-          <p:cNvPr id="33" name="Image 13" descr="preencoded.png">    </p:cNvPr>
-          <p:cNvPicPr>
-            <a:picLocks noChangeAspect="1"/>
-          </p:cNvPicPr>
-          <p:nvPr/>
-        </p:nvPicPr>
-        <p:blipFill>
-          <a:blip r:embed="rId14"/>
-          <a:stretch>
-            <a:fillRect/>
-          </a:stretch>
-        </p:blipFill>
-        <p:spPr>
-          <a:xfrm>
-            <a:off x="5669280" y="2011680"/>
-            <a:ext cx="182880" cy="182880"/>
-          </a:xfrm>
-          <a:prstGeom prst="rect">
-            <a:avLst/>
-          </a:prstGeom>
-        </p:spPr>
-      </p:pic>
-      <p:sp>
-        <p:nvSpPr>
-          <p:cNvPr id="34" name="Text 18"/>
-          <p:cNvSpPr txBox="1"/>
-          <p:nvPr/>
-        </p:nvSpPr>
-        <p:spPr>
-          <a:xfrm>
-            <a:off x="5961888" y="1993392"/>
-            <a:ext cx="2606040" cy="384048"/>
-          </a:xfrm>
-          <a:prstGeom prst="rect">
-            <a:avLst/>
-          </a:prstGeom>
-          <a:noFill/>
-          <a:ln/>
-        </p:spPr>
-        <p:txBody>
-          <a:bodyPr wrap="square" lIns="0" tIns="0" rIns="0" bIns="0" rtlCol="0" anchor="t"/>
-          <a:lstStyle/>
-          <a:p>
-            <a:pPr algn="l" indent="0" marL="0">
-              <a:buNone/>
-            </a:pPr>
-            <a:r>
-              <a:rPr lang="en-US" sz="1150" dirty="0">
-                <a:solidFill>
-                  <a:srgbClr val="0F1419"/>
-                </a:solidFill>
-                <a:latin typeface="Arial" pitchFamily="34" charset="0"/>
-                <a:ea typeface="Arial" pitchFamily="34" charset="-122"/>
-                <a:cs typeface="Arial" pitchFamily="34" charset="-120"/>
-              </a:rPr>
-              <a:t>Telegram alerts on a real phone (being checked)</a:t>
-            </a:r>
-            <a:endParaRPr lang="en-US" sz="1150" dirty="0"/>
-          </a:p>
-        </p:txBody>
-      </p:sp>
-      <p:sp>
-        <p:nvSpPr>
-          <p:cNvPr id="35" name="Shape 19"/>
+      <p:sp>
+        <p:nvSpPr>
+          <p:cNvPr id="33" name="Shape 18"/>
           <p:cNvSpPr/>
           <p:nvPr/>
         </p:nvSpPr>
@@ -11843,7 +11759,7 @@
       </p:sp>
       <p:sp>
         <p:nvSpPr>
-          <p:cNvPr id="36" name="Text 20"/>
+          <p:cNvPr id="34" name="Text 19"/>
           <p:cNvSpPr txBox="1"/>
           <p:nvPr/>
         </p:nvSpPr>
@@ -11882,7 +11798,7 @@
       </p:sp>
       <p:sp>
         <p:nvSpPr>
-          <p:cNvPr id="37" name="Text 21"/>
+          <p:cNvPr id="35" name="Text 20"/>
           <p:cNvSpPr txBox="1"/>
           <p:nvPr/>
         </p:nvSpPr>
@@ -11921,7 +11837,7 @@
       </p:sp>
       <p:sp>
         <p:nvSpPr>
-          <p:cNvPr id="38" name="Text 22"/>
+          <p:cNvPr id="36" name="Text 21"/>
           <p:cNvSpPr txBox="1"/>
           <p:nvPr/>
         </p:nvSpPr>

--- a/docs/pitch/leash-deck.pptx
+++ b/docs/pitch/leash-deck.pptx
@@ -4331,7 +4331,7 @@
                 <a:ea typeface="Arial" pitchFamily="34" charset="-122"/>
                 <a:cs typeface="Arial" pitchFamily="34" charset="-120"/>
               </a:rPr>
-              <a:t>The demo on devnet, and its recording</a:t>
+              <a:t>The demo video, recorded on devnet</a:t>
             </a:r>
             <a:endParaRPr lang="en-US" sz="1150" dirty="0"/>
           </a:p>
@@ -11254,7 +11254,7 @@
                 <a:ea typeface="Arial" pitchFamily="34" charset="-122"/>
                 <a:cs typeface="Arial" pitchFamily="34" charset="-120"/>
               </a:rPr>
-              <a:t>The whole story: on a local validator, in CI, and in one command</a:t>
+              <a:t>The whole story: on devnet, in CI, and in one command</a:t>
             </a:r>
             <a:endParaRPr lang="en-US" sz="1150" dirty="0"/>
           </a:p>
@@ -11693,7 +11693,7 @@
         <p:spPr>
           <a:xfrm>
             <a:off x="5961888" y="1481328"/>
-            <a:ext cx="2606040" cy="384048"/>
+            <a:ext cx="2606040" cy="201168"/>
           </a:xfrm>
           <a:prstGeom prst="rect">
             <a:avLst/>
@@ -11717,7 +11717,7 @@
                 <a:ea typeface="Arial" pitchFamily="34" charset="-122"/>
                 <a:cs typeface="Arial" pitchFamily="34" charset="-120"/>
               </a:rPr>
-              <a:t>The full demo on devnet, and its recording</a:t>
+              <a:t>The demo video, recorded on devnet</a:t>
             </a:r>
             <a:endParaRPr lang="en-US" sz="1150" dirty="0"/>
           </a:p>

--- a/docs/pitch/leash-deck.pptx
+++ b/docs/pitch/leash-deck.pptx
@@ -11790,7 +11790,7 @@
                 <a:ea typeface="Arial" pitchFamily="34" charset="-122"/>
                 <a:cs typeface="Arial" pitchFamily="34" charset="-120"/>
               </a:rPr>
-              <a:t>964</a:t>
+              <a:t>985</a:t>
             </a:r>
             <a:endParaRPr lang="en-US" sz="3600" dirty="0"/>
           </a:p>
@@ -11868,7 +11868,7 @@
                 <a:ea typeface="Arial" pitchFamily="34" charset="-122"/>
                 <a:cs typeface="Arial" pitchFamily="34" charset="-120"/>
               </a:rPr>
-              <a:t>836 TypeScript · 128 Rust</a:t>
+              <a:t>857 TypeScript · 128 Rust</a:t>
             </a:r>
             <a:endParaRPr lang="en-US" sz="1000" dirty="0"/>
           </a:p>

--- a/docs/pitch/leash-deck.pptx
+++ b/docs/pitch/leash-deck.pptx
@@ -2141,68 +2141,46 @@
       </p:sp>
       <p:sp>
         <p:nvSpPr>
-          <p:cNvPr id="7" name="Shape 5"/>
-          <p:cNvSpPr/>
+          <p:cNvPr id="7" name="Text 5"/>
+          <p:cNvSpPr txBox="1"/>
           <p:nvPr/>
         </p:nvSpPr>
         <p:spPr>
           <a:xfrm>
             <a:off x="548640" y="4160520"/>
-            <a:ext cx="3931920" cy="329184"/>
-          </a:xfrm>
-          <a:prstGeom prst="roundRect">
-            <a:avLst>
-              <a:gd name="adj" fmla="val 277778"/>
-            </a:avLst>
-          </a:prstGeom>
-          <a:solidFill>
-            <a:srgbClr val="F8EEE6"/>
-          </a:solidFill>
-          <a:ln/>
-        </p:spPr>
-      </p:sp>
-      <p:sp>
-        <p:nvSpPr>
-          <p:cNvPr id="8" name="Text 6"/>
-          <p:cNvSpPr txBox="1"/>
-          <p:nvPr/>
-        </p:nvSpPr>
-        <p:spPr>
-          <a:xfrm>
-            <a:off x="548640" y="4160520"/>
-            <a:ext cx="3931920" cy="329184"/>
-          </a:xfrm>
-          <a:prstGeom prst="rect">
-            <a:avLst/>
-          </a:prstGeom>
-          <a:noFill/>
-          <a:ln/>
-        </p:spPr>
-        <p:txBody>
-          <a:bodyPr wrap="square" lIns="0" tIns="0" rIns="0" bIns="0" rtlCol="0" anchor="ctr"/>
-          <a:lstStyle/>
-          <a:p>
-            <a:pPr algn="ctr" indent="0" marL="0">
-              <a:buNone/>
-            </a:pPr>
-            <a:r>
-              <a:rPr lang="en-US" sz="1000" b="1" dirty="0">
-                <a:solidFill>
-                  <a:srgbClr val="B45309"/>
-                </a:solidFill>
-                <a:latin typeface="Arial" pitchFamily="34" charset="0"/>
-                <a:ea typeface="Arial" pitchFamily="34" charset="-122"/>
-                <a:cs typeface="Arial" pitchFamily="34" charset="-120"/>
-              </a:rPr>
-              <a:t>[Team: names and roles, to be filled in by Parth]</a:t>
-            </a:r>
-            <a:endParaRPr lang="en-US" sz="1000" dirty="0"/>
+            <a:ext cx="4114800" cy="274320"/>
+          </a:xfrm>
+          <a:prstGeom prst="rect">
+            <a:avLst/>
+          </a:prstGeom>
+          <a:noFill/>
+          <a:ln/>
+        </p:spPr>
+        <p:txBody>
+          <a:bodyPr wrap="square" lIns="0" tIns="0" rIns="0" bIns="0" rtlCol="0" anchor="t"/>
+          <a:lstStyle/>
+          <a:p>
+            <a:pPr algn="l" indent="0" marL="0">
+              <a:buNone/>
+            </a:pPr>
+            <a:r>
+              <a:rPr lang="en-US" sz="1100" b="1" dirty="0">
+                <a:solidFill>
+                  <a:srgbClr val="0F1419"/>
+                </a:solidFill>
+                <a:latin typeface="Arial" pitchFamily="34" charset="0"/>
+                <a:ea typeface="Arial" pitchFamily="34" charset="-122"/>
+                <a:cs typeface="Arial" pitchFamily="34" charset="-120"/>
+              </a:rPr>
+              <a:t>Parth Deshmukh · solo builder</a:t>
+            </a:r>
+            <a:endParaRPr lang="en-US" sz="1100" dirty="0"/>
           </a:p>
         </p:txBody>
       </p:sp>
       <p:pic>
         <p:nvPicPr>
-          <p:cNvPr id="9" name="Image 0" descr="preencoded.png">    </p:cNvPr>
+          <p:cNvPr id="8" name="Image 0" descr="preencoded.png">    </p:cNvPr>
           <p:cNvPicPr>
             <a:picLocks noChangeAspect="1"/>
           </p:cNvPicPr>
@@ -2226,7 +2204,7 @@
       </p:pic>
       <p:sp>
         <p:nvSpPr>
-          <p:cNvPr id="10" name="Shape 7"/>
+          <p:cNvPr id="9" name="Shape 6"/>
           <p:cNvSpPr/>
           <p:nvPr/>
         </p:nvSpPr>
@@ -2253,7 +2231,7 @@
       </p:sp>
       <p:sp>
         <p:nvSpPr>
-          <p:cNvPr id="11" name="Text 8"/>
+          <p:cNvPr id="10" name="Text 7"/>
           <p:cNvSpPr txBox="1"/>
           <p:nvPr/>
         </p:nvSpPr>
@@ -4914,68 +4892,46 @@
       </p:sp>
       <p:sp>
         <p:nvSpPr>
-          <p:cNvPr id="6" name="Shape 4"/>
-          <p:cNvSpPr/>
+          <p:cNvPr id="6" name="Text 4"/>
+          <p:cNvSpPr txBox="1"/>
           <p:nvPr/>
         </p:nvSpPr>
         <p:spPr>
           <a:xfrm>
             <a:off x="2514600" y="3017520"/>
-            <a:ext cx="4114800" cy="329184"/>
-          </a:xfrm>
-          <a:prstGeom prst="roundRect">
-            <a:avLst>
-              <a:gd name="adj" fmla="val 277778"/>
-            </a:avLst>
-          </a:prstGeom>
-          <a:solidFill>
-            <a:srgbClr val="F8EEE6"/>
-          </a:solidFill>
-          <a:ln/>
-        </p:spPr>
-      </p:sp>
-      <p:sp>
-        <p:nvSpPr>
-          <p:cNvPr id="7" name="Text 5"/>
-          <p:cNvSpPr txBox="1"/>
-          <p:nvPr/>
-        </p:nvSpPr>
-        <p:spPr>
-          <a:xfrm>
-            <a:off x="2514600" y="3017520"/>
-            <a:ext cx="4114800" cy="329184"/>
-          </a:xfrm>
-          <a:prstGeom prst="rect">
-            <a:avLst/>
-          </a:prstGeom>
-          <a:noFill/>
-          <a:ln/>
-        </p:spPr>
-        <p:txBody>
-          <a:bodyPr wrap="square" lIns="0" tIns="0" rIns="0" bIns="0" rtlCol="0" anchor="ctr"/>
+            <a:ext cx="4114800" cy="274320"/>
+          </a:xfrm>
+          <a:prstGeom prst="rect">
+            <a:avLst/>
+          </a:prstGeom>
+          <a:noFill/>
+          <a:ln/>
+        </p:spPr>
+        <p:txBody>
+          <a:bodyPr wrap="square" lIns="0" tIns="0" rIns="0" bIns="0" rtlCol="0" anchor="t"/>
           <a:lstStyle/>
           <a:p>
             <a:pPr algn="ctr" indent="0" marL="0">
               <a:buNone/>
             </a:pPr>
             <a:r>
-              <a:rPr lang="en-US" sz="1000" b="1" dirty="0">
-                <a:solidFill>
-                  <a:srgbClr val="B45309"/>
-                </a:solidFill>
-                <a:latin typeface="Arial" pitchFamily="34" charset="0"/>
-                <a:ea typeface="Arial" pitchFamily="34" charset="-122"/>
-                <a:cs typeface="Arial" pitchFamily="34" charset="-120"/>
-              </a:rPr>
-              <a:t>[Team: names and roles, to be filled in by Parth]</a:t>
-            </a:r>
-            <a:endParaRPr lang="en-US" sz="1000" dirty="0"/>
+              <a:rPr lang="en-US" sz="1200" b="1" dirty="0">
+                <a:solidFill>
+                  <a:srgbClr val="0F1419"/>
+                </a:solidFill>
+                <a:latin typeface="Arial" pitchFamily="34" charset="0"/>
+                <a:ea typeface="Arial" pitchFamily="34" charset="-122"/>
+                <a:cs typeface="Arial" pitchFamily="34" charset="-120"/>
+              </a:rPr>
+              <a:t>Parth Deshmukh · solo builder</a:t>
+            </a:r>
+            <a:endParaRPr lang="en-US" sz="1200" dirty="0"/>
           </a:p>
         </p:txBody>
       </p:sp>
       <p:pic>
         <p:nvPicPr>
-          <p:cNvPr id="8" name="Image 0" descr="preencoded.png">    </p:cNvPr>
+          <p:cNvPr id="7" name="Image 0" descr="preencoded.png">    </p:cNvPr>
           <p:cNvPicPr>
             <a:picLocks noChangeAspect="1"/>
           </p:cNvPicPr>
@@ -4999,7 +4955,7 @@
       </p:pic>
       <p:sp>
         <p:nvSpPr>
-          <p:cNvPr id="9" name="Text 6"/>
+          <p:cNvPr id="8" name="Text 5"/>
           <p:cNvSpPr txBox="1"/>
           <p:nvPr/>
         </p:nvSpPr>
@@ -5045,7 +5001,7 @@
       </p:sp>
       <p:pic>
         <p:nvPicPr>
-          <p:cNvPr id="10" name="Image 1" descr="preencoded.png">    </p:cNvPr>
+          <p:cNvPr id="9" name="Image 1" descr="preencoded.png">    </p:cNvPr>
           <p:cNvPicPr>
             <a:picLocks noChangeAspect="1"/>
           </p:cNvPicPr>
@@ -5069,7 +5025,7 @@
       </p:pic>
       <p:sp>
         <p:nvSpPr>
-          <p:cNvPr id="11" name="Text 7"/>
+          <p:cNvPr id="10" name="Text 6"/>
           <p:cNvSpPr txBox="1"/>
           <p:nvPr/>
         </p:nvSpPr>
@@ -5115,7 +5071,7 @@
       </p:sp>
       <p:pic>
         <p:nvPicPr>
-          <p:cNvPr id="12" name="Image 2" descr="preencoded.png">    </p:cNvPr>
+          <p:cNvPr id="11" name="Image 2" descr="preencoded.png">    </p:cNvPr>
           <p:cNvPicPr>
             <a:picLocks noChangeAspect="1"/>
           </p:cNvPicPr>
@@ -5139,7 +5095,7 @@
       </p:pic>
       <p:sp>
         <p:nvSpPr>
-          <p:cNvPr id="13" name="Text 8"/>
+          <p:cNvPr id="12" name="Text 7"/>
           <p:cNvSpPr txBox="1"/>
           <p:nvPr/>
         </p:nvSpPr>
@@ -5178,7 +5134,7 @@
       </p:sp>
       <p:sp>
         <p:nvSpPr>
-          <p:cNvPr id="14" name="Text 9"/>
+          <p:cNvPr id="13" name="Text 8"/>
           <p:cNvSpPr txBox="1"/>
           <p:nvPr/>
         </p:nvSpPr>

--- a/docs/pitch/leash-deck.pptx
+++ b/docs/pitch/leash-deck.pptx
@@ -4309,27 +4309,6 @@
                 <a:ea typeface="Arial" pitchFamily="34" charset="-122"/>
                 <a:cs typeface="Arial" pitchFamily="34" charset="-120"/>
               </a:rPr>
-              <a:t>The demo video, recorded on devnet</a:t>
-            </a:r>
-            <a:endParaRPr lang="en-US" sz="1150" dirty="0"/>
-          </a:p>
-          <a:p>
-            <a:pPr marL="177800" indent="-177800">
-              <a:spcAft>
-                <a:spcPts val="600"/>
-              </a:spcAft>
-              <a:buSzPct val="100000"/>
-              <a:buChar char="•"/>
-            </a:pPr>
-            <a:r>
-              <a:rPr lang="en-US" sz="1150" dirty="0">
-                <a:solidFill>
-                  <a:srgbClr val="0F1419"/>
-                </a:solidFill>
-                <a:latin typeface="Arial" pitchFamily="34" charset="0"/>
-                <a:ea typeface="Arial" pitchFamily="34" charset="-122"/>
-                <a:cs typeface="Arial" pitchFamily="34" charset="-120"/>
-              </a:rPr>
               <a:t>The web app with a real wallet on devnet</a:t>
             </a:r>
             <a:endParaRPr lang="en-US" sz="1150" dirty="0"/>
@@ -11649,7 +11628,7 @@
         <p:spPr>
           <a:xfrm>
             <a:off x="5961888" y="1481328"/>
-            <a:ext cx="2606040" cy="201168"/>
+            <a:ext cx="2606040" cy="384048"/>
           </a:xfrm>
           <a:prstGeom prst="rect">
             <a:avLst/>
@@ -11673,7 +11652,7 @@
                 <a:ea typeface="Arial" pitchFamily="34" charset="-122"/>
                 <a:cs typeface="Arial" pitchFamily="34" charset="-120"/>
               </a:rPr>
-              <a:t>The demo video, recorded on devnet</a:t>
+              <a:t>The control panel with a real wallet, on devnet</a:t>
             </a:r>
             <a:endParaRPr lang="en-US" sz="1150" dirty="0"/>
           </a:p>

--- a/docs/pitch/leash-deck.pptx
+++ b/docs/pitch/leash-deck.pptx
@@ -5097,15 +5097,22 @@
               <a:buNone/>
             </a:pPr>
             <a:r>
-              <a:rPr lang="en-US" sz="950" dirty="0">
-                <a:solidFill>
-                  <a:srgbClr val="0F1419"/>
-                </a:solidFill>
-                <a:latin typeface="Arial" pitchFamily="34" charset="0"/>
-                <a:ea typeface="Arial" pitchFamily="34" charset="-122"/>
-                <a:cs typeface="Arial" pitchFamily="34" charset="-120"/>
-              </a:rPr>
-              <a:t>Demo video: in progress</a:t>
+              <a:rPr lang="en-US" sz="950" u="sng" dirty="0">
+                <a:solidFill>
+                  <a:srgbClr val="6D28D9"/>
+                </a:solidFill>
+                <a:latin typeface="Arial" pitchFamily="34" charset="0"/>
+                <a:ea typeface="Arial" pitchFamily="34" charset="-122"/>
+                <a:cs typeface="Arial" pitchFamily="34" charset="-120"/>
+                <a:hlinkClick r:id="rId6" invalidUrl="" action="" tgtFrame="" tooltip="" history="1" highlightClick="0" endSnd="0">
+                  <a:extLst>
+                    <a:ext uri="{A12FA001-AC4F-418D-AE19-62706E023703}">
+                      <ahyp:hlinkClr xmlns:ahyp="http://schemas.microsoft.com/office/drawing/2018/hyperlinkcolor" val="tx"/>
+                    </a:ext>
+                  </a:extLst>
+                </a:hlinkClick>
+              </a:rPr>
+              <a:t>Demo video (2:19)</a:t>
             </a:r>
             <a:endParaRPr lang="en-US" sz="950" dirty="0"/>
           </a:p>

--- a/docs/pitch/leash-deck.pptx
+++ b/docs/pitch/leash-deck.pptx
@@ -5112,7 +5112,7 @@
                   </a:extLst>
                 </a:hlinkClick>
               </a:rPr>
-              <a:t>Demo video (2:19)</a:t>
+              <a:t>Demo video (2:21)</a:t>
             </a:r>
             <a:endParaRPr lang="en-US" sz="950" dirty="0"/>
           </a:p>

--- a/docs/pitch/leash-deck.pptx
+++ b/docs/pitch/leash-deck.pptx
@@ -5112,7 +5112,7 @@
                   </a:extLst>
                 </a:hlinkClick>
               </a:rPr>
-              <a:t>Demo video (2:21)</a:t>
+              <a:t>Demo video (2:21, YouTube)</a:t>
             </a:r>
             <a:endParaRPr lang="en-US" sz="950" dirty="0"/>
           </a:p>

--- a/docs/pitch/leash-deck.pptx
+++ b/docs/pitch/leash-deck.pptx
@@ -2386,6 +2386,45 @@
         </p:nvSpPr>
         <p:spPr>
           <a:xfrm>
+            <a:off x="548640" y="219456"/>
+            <a:ext cx="8046720" cy="182880"/>
+          </a:xfrm>
+          <a:prstGeom prst="rect">
+            <a:avLst/>
+          </a:prstGeom>
+          <a:noFill/>
+          <a:ln/>
+        </p:spPr>
+        <p:txBody>
+          <a:bodyPr wrap="square" lIns="0" tIns="0" rIns="0" bIns="0" rtlCol="0" anchor="t"/>
+          <a:lstStyle/>
+          <a:p>
+            <a:pPr algn="l" indent="0" marL="0">
+              <a:buNone/>
+            </a:pPr>
+            <a:r>
+              <a:rPr lang="en-US" sz="1000" b="1" spc="150" kern="0" dirty="0">
+                <a:solidFill>
+                  <a:srgbClr val="6D28D9"/>
+                </a:solidFill>
+                <a:latin typeface="Arial" pitchFamily="34" charset="0"/>
+                <a:ea typeface="Arial" pitchFamily="34" charset="-122"/>
+                <a:cs typeface="Arial" pitchFamily="34" charset="-120"/>
+              </a:rPr>
+              <a:t>POTENTIAL TO GROW</a:t>
+            </a:r>
+            <a:endParaRPr lang="en-US" sz="1000" dirty="0"/>
+          </a:p>
+        </p:txBody>
+      </p:sp>
+      <p:sp>
+        <p:nvSpPr>
+          <p:cNvPr id="5" name="Text 3"/>
+          <p:cNvSpPr txBox="1"/>
+          <p:nvPr/>
+        </p:nvSpPr>
+        <p:spPr>
+          <a:xfrm>
             <a:off x="548640" y="384048"/>
             <a:ext cx="8046720" cy="548640"/>
           </a:xfrm>
@@ -2419,7 +2458,7 @@
       </p:sp>
       <p:sp>
         <p:nvSpPr>
-          <p:cNvPr id="5" name="Shape 3"/>
+          <p:cNvPr id="6" name="Shape 4"/>
           <p:cNvSpPr/>
           <p:nvPr/>
         </p:nvSpPr>
@@ -2439,7 +2478,7 @@
       </p:sp>
       <p:pic>
         <p:nvPicPr>
-          <p:cNvPr id="6" name="Image 0" descr="preencoded.png">    </p:cNvPr>
+          <p:cNvPr id="7" name="Image 0" descr="preencoded.png">    </p:cNvPr>
           <p:cNvPicPr>
             <a:picLocks noChangeAspect="1"/>
           </p:cNvPicPr>
@@ -2463,7 +2502,7 @@
       </p:pic>
       <p:sp>
         <p:nvSpPr>
-          <p:cNvPr id="7" name="Text 4"/>
+          <p:cNvPr id="8" name="Text 5"/>
           <p:cNvSpPr txBox="1"/>
           <p:nvPr/>
         </p:nvSpPr>
@@ -2502,7 +2541,7 @@
       </p:sp>
       <p:sp>
         <p:nvSpPr>
-          <p:cNvPr id="8" name="Text 5"/>
+          <p:cNvPr id="9" name="Text 6"/>
           <p:cNvSpPr txBox="1"/>
           <p:nvPr/>
         </p:nvSpPr>
@@ -2541,7 +2580,7 @@
       </p:sp>
       <p:sp>
         <p:nvSpPr>
-          <p:cNvPr id="9" name="Shape 6"/>
+          <p:cNvPr id="10" name="Shape 7"/>
           <p:cNvSpPr/>
           <p:nvPr/>
         </p:nvSpPr>
@@ -2561,7 +2600,7 @@
       </p:sp>
       <p:pic>
         <p:nvPicPr>
-          <p:cNvPr id="10" name="Image 1" descr="preencoded.png">    </p:cNvPr>
+          <p:cNvPr id="11" name="Image 1" descr="preencoded.png">    </p:cNvPr>
           <p:cNvPicPr>
             <a:picLocks noChangeAspect="1"/>
           </p:cNvPicPr>
@@ -2585,7 +2624,7 @@
       </p:pic>
       <p:sp>
         <p:nvSpPr>
-          <p:cNvPr id="11" name="Text 7"/>
+          <p:cNvPr id="12" name="Text 8"/>
           <p:cNvSpPr txBox="1"/>
           <p:nvPr/>
         </p:nvSpPr>
@@ -2624,7 +2663,7 @@
       </p:sp>
       <p:sp>
         <p:nvSpPr>
-          <p:cNvPr id="12" name="Text 8"/>
+          <p:cNvPr id="13" name="Text 9"/>
           <p:cNvSpPr txBox="1"/>
           <p:nvPr/>
         </p:nvSpPr>
@@ -2663,7 +2702,7 @@
       </p:sp>
       <p:sp>
         <p:nvSpPr>
-          <p:cNvPr id="13" name="Shape 9"/>
+          <p:cNvPr id="14" name="Shape 10"/>
           <p:cNvSpPr/>
           <p:nvPr/>
         </p:nvSpPr>
@@ -2683,7 +2722,7 @@
       </p:sp>
       <p:pic>
         <p:nvPicPr>
-          <p:cNvPr id="14" name="Image 2" descr="preencoded.png">    </p:cNvPr>
+          <p:cNvPr id="15" name="Image 2" descr="preencoded.png">    </p:cNvPr>
           <p:cNvPicPr>
             <a:picLocks noChangeAspect="1"/>
           </p:cNvPicPr>
@@ -2707,7 +2746,7 @@
       </p:pic>
       <p:sp>
         <p:nvSpPr>
-          <p:cNvPr id="15" name="Text 10"/>
+          <p:cNvPr id="16" name="Text 11"/>
           <p:cNvSpPr txBox="1"/>
           <p:nvPr/>
         </p:nvSpPr>
@@ -2738,7 +2777,7 @@
                 <a:ea typeface="Arial" pitchFamily="34" charset="-122"/>
                 <a:cs typeface="Arial" pitchFamily="34" charset="-120"/>
               </a:rPr>
-              <a:t>What we know so far</a:t>
+              <a:t>Next: talk to them</a:t>
             </a:r>
             <a:endParaRPr lang="en-US" sz="1300" dirty="0"/>
           </a:p>
@@ -2746,7 +2785,7 @@
       </p:sp>
       <p:sp>
         <p:nvSpPr>
-          <p:cNvPr id="16" name="Text 11"/>
+          <p:cNvPr id="17" name="Text 12"/>
           <p:cNvSpPr txBox="1"/>
           <p:nvPr/>
         </p:nvSpPr>
@@ -2777,7 +2816,7 @@
                 <a:ea typeface="Arial" pitchFamily="34" charset="-122"/>
                 <a:cs typeface="Arial" pitchFamily="34" charset="-120"/>
               </a:rPr>
-              <a:t>No conversations with users yet. Next: five conversations with developers whose agents pay for APIs (Superteam Germany, x402 builders, MCP users).</a:t>
+              <a:t>Five conversations with developers whose agents pay for APIs (Superteam Germany, x402 builders, MCP users), before Nov 2.</a:t>
             </a:r>
             <a:endParaRPr lang="en-US" sz="1150" dirty="0"/>
           </a:p>
@@ -2785,68 +2824,7 @@
       </p:sp>
       <p:sp>
         <p:nvSpPr>
-          <p:cNvPr id="17" name="Shape 12"/>
-          <p:cNvSpPr/>
-          <p:nvPr/>
-        </p:nvSpPr>
-        <p:spPr>
-          <a:xfrm>
-            <a:off x="1051560" y="4023360"/>
-            <a:ext cx="3931920" cy="310896"/>
-          </a:xfrm>
-          <a:prstGeom prst="roundRect">
-            <a:avLst>
-              <a:gd name="adj" fmla="val 294118"/>
-            </a:avLst>
-          </a:prstGeom>
-          <a:solidFill>
-            <a:srgbClr val="F8EEE6"/>
-          </a:solidFill>
-          <a:ln/>
-        </p:spPr>
-      </p:sp>
-      <p:sp>
-        <p:nvSpPr>
-          <p:cNvPr id="18" name="Text 13"/>
-          <p:cNvSpPr txBox="1"/>
-          <p:nvPr/>
-        </p:nvSpPr>
-        <p:spPr>
-          <a:xfrm>
-            <a:off x="1051560" y="4023360"/>
-            <a:ext cx="3931920" cy="310896"/>
-          </a:xfrm>
-          <a:prstGeom prst="rect">
-            <a:avLst/>
-          </a:prstGeom>
-          <a:noFill/>
-          <a:ln/>
-        </p:spPr>
-        <p:txBody>
-          <a:bodyPr wrap="square" lIns="0" tIns="0" rIns="0" bIns="0" rtlCol="0" anchor="ctr"/>
-          <a:lstStyle/>
-          <a:p>
-            <a:pPr algn="ctr" indent="0" marL="0">
-              <a:buNone/>
-            </a:pPr>
-            <a:r>
-              <a:rPr lang="en-US" sz="900" b="1" dirty="0">
-                <a:solidFill>
-                  <a:srgbClr val="B45309"/>
-                </a:solidFill>
-                <a:latin typeface="Arial" pitchFamily="34" charset="0"/>
-                <a:ea typeface="Arial" pitchFamily="34" charset="-122"/>
-                <a:cs typeface="Arial" pitchFamily="34" charset="-120"/>
-              </a:rPr>
-              <a:t>[Parth: replace with who you talked to and what they said]</a:t>
-            </a:r>
-            <a:endParaRPr lang="en-US" sz="900" dirty="0"/>
-          </a:p>
-        </p:txBody>
-      </p:sp>
-      <p:sp>
-        <p:nvSpPr>
-          <p:cNvPr id="19" name="Shape 14"/>
+          <p:cNvPr id="18" name="Shape 13"/>
           <p:cNvSpPr/>
           <p:nvPr/>
         </p:nvSpPr>
@@ -2880,7 +2858,7 @@
       </p:sp>
       <p:sp>
         <p:nvSpPr>
-          <p:cNvPr id="20" name="Text 15"/>
+          <p:cNvPr id="19" name="Text 14"/>
           <p:cNvSpPr txBox="1"/>
           <p:nvPr/>
         </p:nvSpPr>
@@ -2919,7 +2897,7 @@
       </p:sp>
       <p:sp>
         <p:nvSpPr>
-          <p:cNvPr id="21" name="Text 16"/>
+          <p:cNvPr id="20" name="Text 15"/>
           <p:cNvSpPr txBox="1"/>
           <p:nvPr/>
         </p:nvSpPr>
@@ -2958,7 +2936,7 @@
       </p:sp>
       <p:sp>
         <p:nvSpPr>
-          <p:cNvPr id="22" name="Text 17"/>
+          <p:cNvPr id="21" name="Text 16"/>
           <p:cNvSpPr txBox="1"/>
           <p:nvPr/>
         </p:nvSpPr>
@@ -2997,7 +2975,7 @@
       </p:sp>
       <p:sp>
         <p:nvSpPr>
-          <p:cNvPr id="23" name="Text 18"/>
+          <p:cNvPr id="22" name="Text 17"/>
           <p:cNvSpPr txBox="1"/>
           <p:nvPr/>
         </p:nvSpPr>
@@ -3036,7 +3014,7 @@
       </p:sp>
       <p:sp>
         <p:nvSpPr>
-          <p:cNvPr id="24" name="Text 19"/>
+          <p:cNvPr id="23" name="Text 18"/>
           <p:cNvSpPr txBox="1"/>
           <p:nvPr/>
         </p:nvSpPr>
@@ -3075,7 +3053,7 @@
       </p:sp>
       <p:sp>
         <p:nvSpPr>
-          <p:cNvPr id="25" name="Text 20"/>
+          <p:cNvPr id="24" name="Text 19"/>
           <p:cNvSpPr txBox="1"/>
           <p:nvPr/>
         </p:nvSpPr>
@@ -3114,7 +3092,7 @@
       </p:sp>
       <p:sp>
         <p:nvSpPr>
-          <p:cNvPr id="26" name="Text 21"/>
+          <p:cNvPr id="25" name="Text 20"/>
           <p:cNvSpPr txBox="1"/>
           <p:nvPr/>
         </p:nvSpPr>
@@ -3153,7 +3131,7 @@
       </p:sp>
       <p:sp>
         <p:nvSpPr>
-          <p:cNvPr id="27" name="Text 22"/>
+          <p:cNvPr id="26" name="Text 21"/>
           <p:cNvSpPr txBox="1"/>
           <p:nvPr/>
         </p:nvSpPr>
@@ -3192,7 +3170,7 @@
       </p:sp>
       <p:sp>
         <p:nvSpPr>
-          <p:cNvPr id="28" name="Text 23"/>
+          <p:cNvPr id="27" name="Text 22"/>
           <p:cNvSpPr txBox="1"/>
           <p:nvPr/>
         </p:nvSpPr>
@@ -3347,6 +3325,45 @@
         </p:nvSpPr>
         <p:spPr>
           <a:xfrm>
+            <a:off x="548640" y="219456"/>
+            <a:ext cx="8046720" cy="182880"/>
+          </a:xfrm>
+          <a:prstGeom prst="rect">
+            <a:avLst/>
+          </a:prstGeom>
+          <a:noFill/>
+          <a:ln/>
+        </p:spPr>
+        <p:txBody>
+          <a:bodyPr wrap="square" lIns="0" tIns="0" rIns="0" bIns="0" rtlCol="0" anchor="t"/>
+          <a:lstStyle/>
+          <a:p>
+            <a:pPr algn="l" indent="0" marL="0">
+              <a:buNone/>
+            </a:pPr>
+            <a:r>
+              <a:rPr lang="en-US" sz="1000" b="1" spc="150" kern="0" dirty="0">
+                <a:solidFill>
+                  <a:srgbClr val="6D28D9"/>
+                </a:solidFill>
+                <a:latin typeface="Arial" pitchFamily="34" charset="0"/>
+                <a:ea typeface="Arial" pitchFamily="34" charset="-122"/>
+                <a:cs typeface="Arial" pitchFamily="34" charset="-120"/>
+              </a:rPr>
+              <a:t>POTENTIAL TO GROW</a:t>
+            </a:r>
+            <a:endParaRPr lang="en-US" sz="1000" dirty="0"/>
+          </a:p>
+        </p:txBody>
+      </p:sp>
+      <p:sp>
+        <p:nvSpPr>
+          <p:cNvPr id="5" name="Text 3"/>
+          <p:cNvSpPr txBox="1"/>
+          <p:nvPr/>
+        </p:nvSpPr>
+        <p:spPr>
+          <a:xfrm>
             <a:off x="548640" y="384048"/>
             <a:ext cx="8046720" cy="548640"/>
           </a:xfrm>
@@ -3380,7 +3397,7 @@
       </p:sp>
       <p:sp>
         <p:nvSpPr>
-          <p:cNvPr id="5" name="Shape 3"/>
+          <p:cNvPr id="6" name="Shape 4"/>
           <p:cNvSpPr/>
           <p:nvPr/>
         </p:nvSpPr>
@@ -3414,7 +3431,7 @@
       </p:sp>
       <p:sp>
         <p:nvSpPr>
-          <p:cNvPr id="6" name="Shape 4"/>
+          <p:cNvPr id="7" name="Shape 5"/>
           <p:cNvSpPr/>
           <p:nvPr/>
         </p:nvSpPr>
@@ -3434,7 +3451,7 @@
       </p:sp>
       <p:pic>
         <p:nvPicPr>
-          <p:cNvPr id="7" name="Image 0" descr="preencoded.png">    </p:cNvPr>
+          <p:cNvPr id="8" name="Image 0" descr="preencoded.png">    </p:cNvPr>
           <p:cNvPicPr>
             <a:picLocks noChangeAspect="1"/>
           </p:cNvPicPr>
@@ -3458,7 +3475,7 @@
       </p:pic>
       <p:sp>
         <p:nvSpPr>
-          <p:cNvPr id="8" name="Text 5"/>
+          <p:cNvPr id="9" name="Text 6"/>
           <p:cNvSpPr txBox="1"/>
           <p:nvPr/>
         </p:nvSpPr>
@@ -3497,7 +3514,7 @@
       </p:sp>
       <p:sp>
         <p:nvSpPr>
-          <p:cNvPr id="9" name="Text 6"/>
+          <p:cNvPr id="10" name="Text 7"/>
           <p:cNvSpPr txBox="1"/>
           <p:nvPr/>
         </p:nvSpPr>
@@ -3536,7 +3553,7 @@
       </p:sp>
       <p:sp>
         <p:nvSpPr>
-          <p:cNvPr id="10" name="Text 7"/>
+          <p:cNvPr id="11" name="Text 8"/>
           <p:cNvSpPr txBox="1"/>
           <p:nvPr/>
         </p:nvSpPr>
@@ -3575,7 +3592,7 @@
       </p:sp>
       <p:sp>
         <p:nvSpPr>
-          <p:cNvPr id="11" name="Shape 8"/>
+          <p:cNvPr id="12" name="Shape 9"/>
           <p:cNvSpPr/>
           <p:nvPr/>
         </p:nvSpPr>
@@ -3609,7 +3626,7 @@
       </p:sp>
       <p:sp>
         <p:nvSpPr>
-          <p:cNvPr id="12" name="Shape 9"/>
+          <p:cNvPr id="13" name="Shape 10"/>
           <p:cNvSpPr/>
           <p:nvPr/>
         </p:nvSpPr>
@@ -3629,7 +3646,7 @@
       </p:sp>
       <p:pic>
         <p:nvPicPr>
-          <p:cNvPr id="13" name="Image 1" descr="preencoded.png">    </p:cNvPr>
+          <p:cNvPr id="14" name="Image 1" descr="preencoded.png">    </p:cNvPr>
           <p:cNvPicPr>
             <a:picLocks noChangeAspect="1"/>
           </p:cNvPicPr>
@@ -3653,7 +3670,7 @@
       </p:pic>
       <p:sp>
         <p:nvSpPr>
-          <p:cNvPr id="14" name="Text 10"/>
+          <p:cNvPr id="15" name="Text 11"/>
           <p:cNvSpPr txBox="1"/>
           <p:nvPr/>
         </p:nvSpPr>
@@ -3692,7 +3709,7 @@
       </p:sp>
       <p:sp>
         <p:nvSpPr>
-          <p:cNvPr id="15" name="Text 11"/>
+          <p:cNvPr id="16" name="Text 12"/>
           <p:cNvSpPr txBox="1"/>
           <p:nvPr/>
         </p:nvSpPr>
@@ -3731,7 +3748,7 @@
       </p:sp>
       <p:sp>
         <p:nvSpPr>
-          <p:cNvPr id="16" name="Text 12"/>
+          <p:cNvPr id="17" name="Text 13"/>
           <p:cNvSpPr txBox="1"/>
           <p:nvPr/>
         </p:nvSpPr>
@@ -3770,7 +3787,7 @@
       </p:sp>
       <p:sp>
         <p:nvSpPr>
-          <p:cNvPr id="17" name="Shape 13"/>
+          <p:cNvPr id="18" name="Shape 14"/>
           <p:cNvSpPr/>
           <p:nvPr/>
         </p:nvSpPr>
@@ -3804,7 +3821,7 @@
       </p:sp>
       <p:sp>
         <p:nvSpPr>
-          <p:cNvPr id="18" name="Shape 14"/>
+          <p:cNvPr id="19" name="Shape 15"/>
           <p:cNvSpPr/>
           <p:nvPr/>
         </p:nvSpPr>
@@ -3824,7 +3841,7 @@
       </p:sp>
       <p:pic>
         <p:nvPicPr>
-          <p:cNvPr id="19" name="Image 2" descr="preencoded.png">    </p:cNvPr>
+          <p:cNvPr id="20" name="Image 2" descr="preencoded.png">    </p:cNvPr>
           <p:cNvPicPr>
             <a:picLocks noChangeAspect="1"/>
           </p:cNvPicPr>
@@ -3848,7 +3865,7 @@
       </p:pic>
       <p:sp>
         <p:nvSpPr>
-          <p:cNvPr id="20" name="Text 15"/>
+          <p:cNvPr id="21" name="Text 16"/>
           <p:cNvSpPr txBox="1"/>
           <p:nvPr/>
         </p:nvSpPr>
@@ -3887,7 +3904,7 @@
       </p:sp>
       <p:sp>
         <p:nvSpPr>
-          <p:cNvPr id="21" name="Text 16"/>
+          <p:cNvPr id="22" name="Text 17"/>
           <p:cNvSpPr txBox="1"/>
           <p:nvPr/>
         </p:nvSpPr>
@@ -3926,7 +3943,7 @@
       </p:sp>
       <p:sp>
         <p:nvSpPr>
-          <p:cNvPr id="22" name="Text 17"/>
+          <p:cNvPr id="23" name="Text 18"/>
           <p:cNvSpPr txBox="1"/>
           <p:nvPr/>
         </p:nvSpPr>
@@ -3965,7 +3982,7 @@
       </p:sp>
       <p:sp>
         <p:nvSpPr>
-          <p:cNvPr id="23" name="Text 18"/>
+          <p:cNvPr id="24" name="Text 19"/>
           <p:cNvSpPr txBox="1"/>
           <p:nvPr/>
         </p:nvSpPr>
@@ -4120,6 +4137,45 @@
         </p:nvSpPr>
         <p:spPr>
           <a:xfrm>
+            <a:off x="548640" y="219456"/>
+            <a:ext cx="8046720" cy="182880"/>
+          </a:xfrm>
+          <a:prstGeom prst="rect">
+            <a:avLst/>
+          </a:prstGeom>
+          <a:noFill/>
+          <a:ln/>
+        </p:spPr>
+        <p:txBody>
+          <a:bodyPr wrap="square" lIns="0" tIns="0" rIns="0" bIns="0" rtlCol="0" anchor="t"/>
+          <a:lstStyle/>
+          <a:p>
+            <a:pPr algn="l" indent="0" marL="0">
+              <a:buNone/>
+            </a:pPr>
+            <a:r>
+              <a:rPr lang="en-US" sz="1000" b="1" spc="150" kern="0" dirty="0">
+                <a:solidFill>
+                  <a:srgbClr val="6D28D9"/>
+                </a:solidFill>
+                <a:latin typeface="Arial" pitchFamily="34" charset="0"/>
+                <a:ea typeface="Arial" pitchFamily="34" charset="-122"/>
+                <a:cs typeface="Arial" pitchFamily="34" charset="-120"/>
+              </a:rPr>
+              <a:t>POTENTIAL TO GROW</a:t>
+            </a:r>
+            <a:endParaRPr lang="en-US" sz="1000" dirty="0"/>
+          </a:p>
+        </p:txBody>
+      </p:sp>
+      <p:sp>
+        <p:nvSpPr>
+          <p:cNvPr id="5" name="Text 3"/>
+          <p:cNvSpPr txBox="1"/>
+          <p:nvPr/>
+        </p:nvSpPr>
+        <p:spPr>
+          <a:xfrm>
             <a:off x="548640" y="384048"/>
             <a:ext cx="8046720" cy="548640"/>
           </a:xfrm>
@@ -4153,7 +4209,7 @@
       </p:sp>
       <p:sp>
         <p:nvSpPr>
-          <p:cNvPr id="5" name="Shape 3"/>
+          <p:cNvPr id="6" name="Shape 4"/>
           <p:cNvSpPr/>
           <p:nvPr/>
         </p:nvSpPr>
@@ -4176,7 +4232,7 @@
       </p:sp>
       <p:sp>
         <p:nvSpPr>
-          <p:cNvPr id="6" name="Shape 4"/>
+          <p:cNvPr id="7" name="Shape 5"/>
           <p:cNvSpPr/>
           <p:nvPr/>
         </p:nvSpPr>
@@ -4196,7 +4252,7 @@
       </p:sp>
       <p:sp>
         <p:nvSpPr>
-          <p:cNvPr id="7" name="Text 5"/>
+          <p:cNvPr id="8" name="Text 6"/>
           <p:cNvSpPr txBox="1"/>
           <p:nvPr/>
         </p:nvSpPr>
@@ -4235,7 +4291,7 @@
       </p:sp>
       <p:sp>
         <p:nvSpPr>
-          <p:cNvPr id="8" name="Text 6"/>
+          <p:cNvPr id="9" name="Text 7"/>
           <p:cNvSpPr txBox="1"/>
           <p:nvPr/>
         </p:nvSpPr>
@@ -4274,7 +4330,7 @@
       </p:sp>
       <p:sp>
         <p:nvSpPr>
-          <p:cNvPr id="9" name="Text 7"/>
+          <p:cNvPr id="10" name="Text 8"/>
           <p:cNvSpPr txBox="1"/>
           <p:nvPr/>
         </p:nvSpPr>
@@ -4317,7 +4373,7 @@
       </p:sp>
       <p:sp>
         <p:nvSpPr>
-          <p:cNvPr id="10" name="Shape 8"/>
+          <p:cNvPr id="11" name="Shape 9"/>
           <p:cNvSpPr/>
           <p:nvPr/>
         </p:nvSpPr>
@@ -4337,7 +4393,7 @@
       </p:sp>
       <p:sp>
         <p:nvSpPr>
-          <p:cNvPr id="11" name="Text 9"/>
+          <p:cNvPr id="12" name="Text 10"/>
           <p:cNvSpPr txBox="1"/>
           <p:nvPr/>
         </p:nvSpPr>
@@ -4376,7 +4432,7 @@
       </p:sp>
       <p:sp>
         <p:nvSpPr>
-          <p:cNvPr id="12" name="Text 10"/>
+          <p:cNvPr id="13" name="Text 11"/>
           <p:cNvSpPr txBox="1"/>
           <p:nvPr/>
         </p:nvSpPr>
@@ -4415,7 +4471,7 @@
       </p:sp>
       <p:sp>
         <p:nvSpPr>
-          <p:cNvPr id="13" name="Text 11"/>
+          <p:cNvPr id="14" name="Text 12"/>
           <p:cNvSpPr txBox="1"/>
           <p:nvPr/>
         </p:nvSpPr>
@@ -4500,7 +4556,7 @@
       </p:sp>
       <p:sp>
         <p:nvSpPr>
-          <p:cNvPr id="14" name="Shape 12"/>
+          <p:cNvPr id="15" name="Shape 13"/>
           <p:cNvSpPr/>
           <p:nvPr/>
         </p:nvSpPr>
@@ -4520,7 +4576,7 @@
       </p:sp>
       <p:sp>
         <p:nvSpPr>
-          <p:cNvPr id="15" name="Text 13"/>
+          <p:cNvPr id="16" name="Text 14"/>
           <p:cNvSpPr txBox="1"/>
           <p:nvPr/>
         </p:nvSpPr>
@@ -4559,7 +4615,7 @@
       </p:sp>
       <p:sp>
         <p:nvSpPr>
-          <p:cNvPr id="16" name="Text 14"/>
+          <p:cNvPr id="17" name="Text 15"/>
           <p:cNvSpPr txBox="1"/>
           <p:nvPr/>
         </p:nvSpPr>
@@ -4598,7 +4654,7 @@
       </p:sp>
       <p:sp>
         <p:nvSpPr>
-          <p:cNvPr id="17" name="Text 15"/>
+          <p:cNvPr id="18" name="Text 16"/>
           <p:cNvSpPr txBox="1"/>
           <p:nvPr/>
         </p:nvSpPr>
@@ -5275,6 +5331,45 @@
         </p:nvSpPr>
         <p:spPr>
           <a:xfrm>
+            <a:off x="548640" y="219456"/>
+            <a:ext cx="8046720" cy="182880"/>
+          </a:xfrm>
+          <a:prstGeom prst="rect">
+            <a:avLst/>
+          </a:prstGeom>
+          <a:noFill/>
+          <a:ln/>
+        </p:spPr>
+        <p:txBody>
+          <a:bodyPr wrap="square" lIns="0" tIns="0" rIns="0" bIns="0" rtlCol="0" anchor="t"/>
+          <a:lstStyle/>
+          <a:p>
+            <a:pPr algn="l" indent="0" marL="0">
+              <a:buNone/>
+            </a:pPr>
+            <a:r>
+              <a:rPr lang="en-US" sz="1000" b="1" spc="150" kern="0" dirty="0">
+                <a:solidFill>
+                  <a:srgbClr val="6D28D9"/>
+                </a:solidFill>
+                <a:latin typeface="Arial" pitchFamily="34" charset="0"/>
+                <a:ea typeface="Arial" pitchFamily="34" charset="-122"/>
+                <a:cs typeface="Arial" pitchFamily="34" charset="-120"/>
+              </a:rPr>
+              <a:t>THE PROBLEM</a:t>
+            </a:r>
+            <a:endParaRPr lang="en-US" sz="1000" dirty="0"/>
+          </a:p>
+        </p:txBody>
+      </p:sp>
+      <p:sp>
+        <p:nvSpPr>
+          <p:cNvPr id="5" name="Text 3"/>
+          <p:cNvSpPr txBox="1"/>
+          <p:nvPr/>
+        </p:nvSpPr>
+        <p:spPr>
+          <a:xfrm>
             <a:off x="548640" y="384048"/>
             <a:ext cx="8046720" cy="548640"/>
           </a:xfrm>
@@ -5300,7 +5395,7 @@
                 <a:ea typeface="Arial" pitchFamily="34" charset="-122"/>
                 <a:cs typeface="Arial" pitchFamily="34" charset="-120"/>
               </a:rPr>
-              <a:t>An agent's wallet is all or nothing</a:t>
+              <a:t>A fooled agent can empty its whole wallet</a:t>
             </a:r>
             <a:endParaRPr lang="en-US" sz="3000" dirty="0"/>
           </a:p>
@@ -5308,7 +5403,7 @@
       </p:sp>
       <p:sp>
         <p:nvSpPr>
-          <p:cNvPr id="5" name="Shape 3"/>
+          <p:cNvPr id="6" name="Shape 4"/>
           <p:cNvSpPr/>
           <p:nvPr/>
         </p:nvSpPr>
@@ -5342,7 +5437,7 @@
       </p:sp>
       <p:sp>
         <p:nvSpPr>
-          <p:cNvPr id="6" name="Shape 4"/>
+          <p:cNvPr id="7" name="Shape 5"/>
           <p:cNvSpPr/>
           <p:nvPr/>
         </p:nvSpPr>
@@ -5362,7 +5457,7 @@
       </p:sp>
       <p:pic>
         <p:nvPicPr>
-          <p:cNvPr id="7" name="Image 0" descr="preencoded.png">    </p:cNvPr>
+          <p:cNvPr id="8" name="Image 0" descr="preencoded.png">    </p:cNvPr>
           <p:cNvPicPr>
             <a:picLocks noChangeAspect="1"/>
           </p:cNvPicPr>
@@ -5386,7 +5481,7 @@
       </p:pic>
       <p:sp>
         <p:nvSpPr>
-          <p:cNvPr id="8" name="Text 5"/>
+          <p:cNvPr id="9" name="Text 6"/>
           <p:cNvSpPr txBox="1"/>
           <p:nvPr/>
         </p:nvSpPr>
@@ -5425,7 +5520,7 @@
       </p:sp>
       <p:sp>
         <p:nvSpPr>
-          <p:cNvPr id="9" name="Text 6"/>
+          <p:cNvPr id="10" name="Text 7"/>
           <p:cNvSpPr txBox="1"/>
           <p:nvPr/>
         </p:nvSpPr>
@@ -5464,7 +5559,7 @@
       </p:sp>
       <p:sp>
         <p:nvSpPr>
-          <p:cNvPr id="10" name="Shape 7"/>
+          <p:cNvPr id="11" name="Shape 8"/>
           <p:cNvSpPr/>
           <p:nvPr/>
         </p:nvSpPr>
@@ -5488,7 +5583,7 @@
       </p:sp>
       <p:sp>
         <p:nvSpPr>
-          <p:cNvPr id="11" name="Shape 8"/>
+          <p:cNvPr id="12" name="Shape 9"/>
           <p:cNvSpPr/>
           <p:nvPr/>
         </p:nvSpPr>
@@ -5522,7 +5617,7 @@
       </p:sp>
       <p:sp>
         <p:nvSpPr>
-          <p:cNvPr id="12" name="Shape 9"/>
+          <p:cNvPr id="13" name="Shape 10"/>
           <p:cNvSpPr/>
           <p:nvPr/>
         </p:nvSpPr>
@@ -5542,7 +5637,7 @@
       </p:sp>
       <p:pic>
         <p:nvPicPr>
-          <p:cNvPr id="13" name="Image 1" descr="preencoded.png">    </p:cNvPr>
+          <p:cNvPr id="14" name="Image 1" descr="preencoded.png">    </p:cNvPr>
           <p:cNvPicPr>
             <a:picLocks noChangeAspect="1"/>
           </p:cNvPicPr>
@@ -5566,7 +5661,7 @@
       </p:pic>
       <p:sp>
         <p:nvSpPr>
-          <p:cNvPr id="14" name="Text 10"/>
+          <p:cNvPr id="15" name="Text 11"/>
           <p:cNvSpPr txBox="1"/>
           <p:nvPr/>
         </p:nvSpPr>
@@ -5605,7 +5700,7 @@
       </p:sp>
       <p:sp>
         <p:nvSpPr>
-          <p:cNvPr id="15" name="Text 11"/>
+          <p:cNvPr id="16" name="Text 12"/>
           <p:cNvSpPr txBox="1"/>
           <p:nvPr/>
         </p:nvSpPr>
@@ -5644,7 +5739,7 @@
       </p:sp>
       <p:sp>
         <p:nvSpPr>
-          <p:cNvPr id="16" name="Shape 12"/>
+          <p:cNvPr id="17" name="Shape 13"/>
           <p:cNvSpPr/>
           <p:nvPr/>
         </p:nvSpPr>
@@ -5668,7 +5763,7 @@
       </p:sp>
       <p:sp>
         <p:nvSpPr>
-          <p:cNvPr id="17" name="Shape 13"/>
+          <p:cNvPr id="18" name="Shape 14"/>
           <p:cNvSpPr/>
           <p:nvPr/>
         </p:nvSpPr>
@@ -5702,7 +5797,7 @@
       </p:sp>
       <p:sp>
         <p:nvSpPr>
-          <p:cNvPr id="18" name="Shape 14"/>
+          <p:cNvPr id="19" name="Shape 15"/>
           <p:cNvSpPr/>
           <p:nvPr/>
         </p:nvSpPr>
@@ -5722,7 +5817,7 @@
       </p:sp>
       <p:pic>
         <p:nvPicPr>
-          <p:cNvPr id="19" name="Image 2" descr="preencoded.png">    </p:cNvPr>
+          <p:cNvPr id="20" name="Image 2" descr="preencoded.png">    </p:cNvPr>
           <p:cNvPicPr>
             <a:picLocks noChangeAspect="1"/>
           </p:cNvPicPr>
@@ -5746,7 +5841,7 @@
       </p:pic>
       <p:sp>
         <p:nvSpPr>
-          <p:cNvPr id="20" name="Text 15"/>
+          <p:cNvPr id="21" name="Text 16"/>
           <p:cNvSpPr txBox="1"/>
           <p:nvPr/>
         </p:nvSpPr>
@@ -5785,7 +5880,7 @@
       </p:sp>
       <p:sp>
         <p:nvSpPr>
-          <p:cNvPr id="21" name="Text 16"/>
+          <p:cNvPr id="22" name="Text 17"/>
           <p:cNvSpPr txBox="1"/>
           <p:nvPr/>
         </p:nvSpPr>
@@ -5824,14 +5919,14 @@
       </p:sp>
       <p:sp>
         <p:nvSpPr>
-          <p:cNvPr id="22" name="Text 17"/>
-          <p:cNvSpPr txBox="1"/>
-          <p:nvPr/>
-        </p:nvSpPr>
-        <p:spPr>
-          <a:xfrm>
-            <a:off x="548640" y="3017520"/>
-            <a:ext cx="8046720" cy="1280160"/>
+          <p:cNvPr id="23" name="Text 18"/>
+          <p:cNvSpPr txBox="1"/>
+          <p:nvPr/>
+        </p:nvSpPr>
+        <p:spPr>
+          <a:xfrm>
+            <a:off x="548640" y="3063240"/>
+            <a:ext cx="8046720" cy="640080"/>
           </a:xfrm>
           <a:prstGeom prst="rect">
             <a:avLst/>
@@ -5843,14 +5938,11 @@
           <a:bodyPr wrap="square" lIns="0" tIns="0" rIns="0" bIns="0" rtlCol="0" anchor="t"/>
           <a:lstStyle/>
           <a:p>
-            <a:pPr indent="0" marL="0">
-              <a:spcAft>
-                <a:spcPts val="1000"/>
-              </a:spcAft>
-              <a:buNone/>
-            </a:pPr>
-            <a:r>
-              <a:rPr lang="en-US" sz="1400" b="1" dirty="0">
+            <a:pPr algn="l" indent="0" marL="0">
+              <a:buNone/>
+            </a:pPr>
+            <a:r>
+              <a:rPr lang="en-US" sz="1900" b="1" dirty="0">
                 <a:solidFill>
                   <a:srgbClr val="0F1419"/>
                 </a:solidFill>
@@ -5858,58 +5950,60 @@
                 <a:ea typeface="Arial" pitchFamily="34" charset="-122"/>
                 <a:cs typeface="Arial" pitchFamily="34" charset="-120"/>
               </a:rPr>
-              <a:t>An agent does what the text in front of it says.</a:t>
-            </a:r>
-            <a:pPr indent="0" marL="0">
-              <a:spcAft>
-                <a:spcPts val="1000"/>
-              </a:spcAft>
-              <a:buNone/>
-            </a:pPr>
-            <a:r>
-              <a:rPr lang="en-US" sz="1400" dirty="0">
-                <a:solidFill>
-                  <a:srgbClr val="0F1419"/>
-                </a:solidFill>
-                <a:latin typeface="Arial" pitchFamily="34" charset="0"/>
-                <a:ea typeface="Arial" pitchFamily="34" charset="-122"/>
-                <a:cs typeface="Arial" pitchFamily="34" charset="-120"/>
-              </a:rPr>
-              <a:t> A crafted message can make it pay the attacker.</a:t>
-            </a:r>
-            <a:endParaRPr lang="en-US" sz="1400" dirty="0"/>
-          </a:p>
-          <a:p>
-            <a:pPr indent="0" marL="0">
-              <a:spcAft>
-                <a:spcPts val="1000"/>
-              </a:spcAft>
-              <a:buNone/>
-            </a:pPr>
-            <a:r>
-              <a:rPr lang="en-US" sz="1400" dirty="0">
-                <a:solidFill>
-                  <a:srgbClr val="0F1419"/>
-                </a:solidFill>
-                <a:latin typeface="Arial" pitchFamily="34" charset="0"/>
-                <a:ea typeface="Arial" pitchFamily="34" charset="-122"/>
-                <a:cs typeface="Arial" pitchFamily="34" charset="-120"/>
-              </a:rPr>
-              <a:t>Today a developer hands the agent a private key or a custodial wallet: the agent, and anyone who can fool it, can move the whole balance.</a:t>
-            </a:r>
-            <a:endParaRPr lang="en-US" sz="1400" dirty="0"/>
-          </a:p>
-        </p:txBody>
-      </p:sp>
-      <p:sp>
-        <p:nvSpPr>
-          <p:cNvPr id="23" name="Text 18"/>
-          <p:cNvSpPr txBox="1"/>
-          <p:nvPr/>
-        </p:nvSpPr>
-        <p:spPr>
-          <a:xfrm>
-            <a:off x="548640" y="4434840"/>
+              <a:t>Today, giving an AI agent a wallet gives anyone who can fool it the whole balance.</a:t>
+            </a:r>
+            <a:endParaRPr lang="en-US" sz="1900" dirty="0"/>
+          </a:p>
+        </p:txBody>
+      </p:sp>
+      <p:sp>
+        <p:nvSpPr>
+          <p:cNvPr id="24" name="Text 19"/>
+          <p:cNvSpPr txBox="1"/>
+          <p:nvPr/>
+        </p:nvSpPr>
+        <p:spPr>
+          <a:xfrm>
+            <a:off x="548640" y="3794760"/>
+            <a:ext cx="8046720" cy="502920"/>
+          </a:xfrm>
+          <a:prstGeom prst="rect">
+            <a:avLst/>
+          </a:prstGeom>
+          <a:noFill/>
+          <a:ln/>
+        </p:spPr>
+        <p:txBody>
+          <a:bodyPr wrap="square" lIns="0" tIns="0" rIns="0" bIns="0" rtlCol="0" anchor="t"/>
+          <a:lstStyle/>
+          <a:p>
+            <a:pPr algn="l" indent="0" marL="0">
+              <a:buNone/>
+            </a:pPr>
+            <a:r>
+              <a:rPr lang="en-US" sz="1250" dirty="0">
+                <a:solidFill>
+                  <a:srgbClr val="535C6B"/>
+                </a:solidFill>
+                <a:latin typeface="Arial" pitchFamily="34" charset="0"/>
+                <a:ea typeface="Arial" pitchFamily="34" charset="-122"/>
+                <a:cs typeface="Arial" pitchFamily="34" charset="-120"/>
+              </a:rPr>
+              <a:t>Developers hand agents a private key or a custodial wallet. No model is immune to a crafted message, and nothing between the agent and the money asks whether a payment makes sense.</a:t>
+            </a:r>
+            <a:endParaRPr lang="en-US" sz="1250" dirty="0"/>
+          </a:p>
+        </p:txBody>
+      </p:sp>
+      <p:sp>
+        <p:nvSpPr>
+          <p:cNvPr id="25" name="Text 20"/>
+          <p:cNvSpPr txBox="1"/>
+          <p:nvPr/>
+        </p:nvSpPr>
+        <p:spPr>
+          <a:xfrm>
+            <a:off x="548640" y="4480560"/>
             <a:ext cx="5486400" cy="201168"/>
           </a:xfrm>
           <a:prstGeom prst="rect">
@@ -6058,6 +6152,45 @@
         </p:nvSpPr>
         <p:spPr>
           <a:xfrm>
+            <a:off x="548640" y="219456"/>
+            <a:ext cx="8046720" cy="182880"/>
+          </a:xfrm>
+          <a:prstGeom prst="rect">
+            <a:avLst/>
+          </a:prstGeom>
+          <a:noFill/>
+          <a:ln/>
+        </p:spPr>
+        <p:txBody>
+          <a:bodyPr wrap="square" lIns="0" tIns="0" rIns="0" bIns="0" rtlCol="0" anchor="t"/>
+          <a:lstStyle/>
+          <a:p>
+            <a:pPr algn="l" indent="0" marL="0">
+              <a:buNone/>
+            </a:pPr>
+            <a:r>
+              <a:rPr lang="en-US" sz="1000" b="1" spc="150" kern="0" dirty="0">
+                <a:solidFill>
+                  <a:srgbClr val="6D28D9"/>
+                </a:solidFill>
+                <a:latin typeface="Arial" pitchFamily="34" charset="0"/>
+                <a:ea typeface="Arial" pitchFamily="34" charset="-122"/>
+                <a:cs typeface="Arial" pitchFamily="34" charset="-120"/>
+              </a:rPr>
+              <a:t>WHY NOW</a:t>
+            </a:r>
+            <a:endParaRPr lang="en-US" sz="1000" dirty="0"/>
+          </a:p>
+        </p:txBody>
+      </p:sp>
+      <p:sp>
+        <p:nvSpPr>
+          <p:cNvPr id="5" name="Text 3"/>
+          <p:cNvSpPr txBox="1"/>
+          <p:nvPr/>
+        </p:nvSpPr>
+        <p:spPr>
+          <a:xfrm>
             <a:off x="548640" y="384048"/>
             <a:ext cx="8046720" cy="548640"/>
           </a:xfrm>
@@ -6091,7 +6224,7 @@
       </p:sp>
       <p:sp>
         <p:nvSpPr>
-          <p:cNvPr id="5" name="Text 3"/>
+          <p:cNvPr id="6" name="Text 4"/>
           <p:cNvSpPr txBox="1"/>
           <p:nvPr/>
         </p:nvSpPr>
@@ -6130,7 +6263,7 @@
       </p:sp>
       <p:sp>
         <p:nvSpPr>
-          <p:cNvPr id="6" name="Text 4"/>
+          <p:cNvPr id="7" name="Text 5"/>
           <p:cNvSpPr txBox="1"/>
           <p:nvPr/>
         </p:nvSpPr>
@@ -6169,7 +6302,7 @@
       </p:sp>
       <p:sp>
         <p:nvSpPr>
-          <p:cNvPr id="7" name="Text 5"/>
+          <p:cNvPr id="8" name="Text 6"/>
           <p:cNvSpPr txBox="1"/>
           <p:nvPr/>
         </p:nvSpPr>
@@ -6208,7 +6341,7 @@
       </p:sp>
       <p:sp>
         <p:nvSpPr>
-          <p:cNvPr id="8" name="Text 6"/>
+          <p:cNvPr id="9" name="Text 7"/>
           <p:cNvSpPr txBox="1"/>
           <p:nvPr/>
         </p:nvSpPr>
@@ -6247,7 +6380,7 @@
       </p:sp>
       <p:sp>
         <p:nvSpPr>
-          <p:cNvPr id="9" name="Shape 7"/>
+          <p:cNvPr id="10" name="Shape 8"/>
           <p:cNvSpPr/>
           <p:nvPr/>
         </p:nvSpPr>
@@ -6281,7 +6414,7 @@
       </p:sp>
       <p:sp>
         <p:nvSpPr>
-          <p:cNvPr id="10" name="Text 8"/>
+          <p:cNvPr id="11" name="Text 9"/>
           <p:cNvSpPr txBox="1"/>
           <p:nvPr/>
         </p:nvSpPr>
@@ -6320,7 +6453,7 @@
       </p:sp>
       <p:sp>
         <p:nvSpPr>
-          <p:cNvPr id="11" name="Text 9"/>
+          <p:cNvPr id="12" name="Text 10"/>
           <p:cNvSpPr txBox="1"/>
           <p:nvPr/>
         </p:nvSpPr>
@@ -6359,7 +6492,7 @@
       </p:sp>
       <p:sp>
         <p:nvSpPr>
-          <p:cNvPr id="12" name="Text 10"/>
+          <p:cNvPr id="13" name="Text 11"/>
           <p:cNvSpPr txBox="1"/>
           <p:nvPr/>
         </p:nvSpPr>
@@ -6398,7 +6531,7 @@
       </p:sp>
       <p:sp>
         <p:nvSpPr>
-          <p:cNvPr id="13" name="Shape 11"/>
+          <p:cNvPr id="14" name="Shape 12"/>
           <p:cNvSpPr/>
           <p:nvPr/>
         </p:nvSpPr>
@@ -6420,7 +6553,7 @@
       </p:sp>
       <p:pic>
         <p:nvPicPr>
-          <p:cNvPr id="14" name="Image 0" descr="preencoded.png">    </p:cNvPr>
+          <p:cNvPr id="15" name="Image 0" descr="preencoded.png">    </p:cNvPr>
           <p:cNvPicPr>
             <a:picLocks noChangeAspect="1"/>
           </p:cNvPicPr>
@@ -6444,7 +6577,7 @@
       </p:pic>
       <p:sp>
         <p:nvSpPr>
-          <p:cNvPr id="15" name="Text 12"/>
+          <p:cNvPr id="16" name="Text 13"/>
           <p:cNvSpPr txBox="1"/>
           <p:nvPr/>
         </p:nvSpPr>
@@ -6483,7 +6616,7 @@
       </p:sp>
       <p:sp>
         <p:nvSpPr>
-          <p:cNvPr id="16" name="Text 13"/>
+          <p:cNvPr id="17" name="Text 14"/>
           <p:cNvSpPr txBox="1"/>
           <p:nvPr/>
         </p:nvSpPr>
@@ -6522,7 +6655,7 @@
       </p:sp>
       <p:sp>
         <p:nvSpPr>
-          <p:cNvPr id="17" name="Shape 14"/>
+          <p:cNvPr id="18" name="Shape 15"/>
           <p:cNvSpPr/>
           <p:nvPr/>
         </p:nvSpPr>
@@ -6544,7 +6677,7 @@
       </p:sp>
       <p:pic>
         <p:nvPicPr>
-          <p:cNvPr id="18" name="Image 1" descr="preencoded.png">    </p:cNvPr>
+          <p:cNvPr id="19" name="Image 1" descr="preencoded.png">    </p:cNvPr>
           <p:cNvPicPr>
             <a:picLocks noChangeAspect="1"/>
           </p:cNvPicPr>
@@ -6568,7 +6701,7 @@
       </p:pic>
       <p:sp>
         <p:nvSpPr>
-          <p:cNvPr id="19" name="Text 15"/>
+          <p:cNvPr id="20" name="Text 16"/>
           <p:cNvSpPr txBox="1"/>
           <p:nvPr/>
         </p:nvSpPr>
@@ -6607,7 +6740,7 @@
       </p:sp>
       <p:sp>
         <p:nvSpPr>
-          <p:cNvPr id="20" name="Text 16"/>
+          <p:cNvPr id="21" name="Text 17"/>
           <p:cNvSpPr txBox="1"/>
           <p:nvPr/>
         </p:nvSpPr>
@@ -6646,7 +6779,7 @@
       </p:sp>
       <p:sp>
         <p:nvSpPr>
-          <p:cNvPr id="21" name="Text 17"/>
+          <p:cNvPr id="22" name="Text 18"/>
           <p:cNvSpPr txBox="1"/>
           <p:nvPr/>
         </p:nvSpPr>
@@ -6801,6 +6934,45 @@
         </p:nvSpPr>
         <p:spPr>
           <a:xfrm>
+            <a:off x="548640" y="219456"/>
+            <a:ext cx="8046720" cy="182880"/>
+          </a:xfrm>
+          <a:prstGeom prst="rect">
+            <a:avLst/>
+          </a:prstGeom>
+          <a:noFill/>
+          <a:ln/>
+        </p:spPr>
+        <p:txBody>
+          <a:bodyPr wrap="square" lIns="0" tIns="0" rIns="0" bIns="0" rtlCol="0" anchor="t"/>
+          <a:lstStyle/>
+          <a:p>
+            <a:pPr algn="l" indent="0" marL="0">
+              <a:buNone/>
+            </a:pPr>
+            <a:r>
+              <a:rPr lang="en-US" sz="1000" b="1" spc="150" kern="0" dirty="0">
+                <a:solidFill>
+                  <a:srgbClr val="6D28D9"/>
+                </a:solidFill>
+                <a:latin typeface="Arial" pitchFamily="34" charset="0"/>
+                <a:ea typeface="Arial" pitchFamily="34" charset="-122"/>
+                <a:cs typeface="Arial" pitchFamily="34" charset="-120"/>
+              </a:rPr>
+              <a:t>THE SOLUTION</a:t>
+            </a:r>
+            <a:endParaRPr lang="en-US" sz="1000" dirty="0"/>
+          </a:p>
+        </p:txBody>
+      </p:sp>
+      <p:sp>
+        <p:nvSpPr>
+          <p:cNvPr id="5" name="Text 3"/>
+          <p:cNvSpPr txBox="1"/>
+          <p:nvPr/>
+        </p:nvSpPr>
+        <p:spPr>
+          <a:xfrm>
             <a:off x="548640" y="384048"/>
             <a:ext cx="8046720" cy="548640"/>
           </a:xfrm>
@@ -6826,7 +6998,7 @@
                 <a:ea typeface="Arial" pitchFamily="34" charset="-122"/>
                 <a:cs typeface="Arial" pitchFamily="34" charset="-120"/>
               </a:rPr>
-              <a:t>A firewall between agent and money</a:t>
+              <a:t>Leash: a spending firewall for AI agents</a:t>
             </a:r>
             <a:endParaRPr lang="en-US" sz="3000" dirty="0"/>
           </a:p>
@@ -6834,14 +7006,53 @@
       </p:sp>
       <p:sp>
         <p:nvSpPr>
-          <p:cNvPr id="5" name="Shape 3"/>
+          <p:cNvPr id="6" name="Text 4"/>
+          <p:cNvSpPr txBox="1"/>
+          <p:nvPr/>
+        </p:nvSpPr>
+        <p:spPr>
+          <a:xfrm>
+            <a:off x="548640" y="1005840"/>
+            <a:ext cx="8046720" cy="502920"/>
+          </a:xfrm>
+          <a:prstGeom prst="rect">
+            <a:avLst/>
+          </a:prstGeom>
+          <a:noFill/>
+          <a:ln/>
+        </p:spPr>
+        <p:txBody>
+          <a:bodyPr wrap="square" lIns="0" tIns="0" rIns="0" bIns="0" rtlCol="0" anchor="t"/>
+          <a:lstStyle/>
+          <a:p>
+            <a:pPr algn="l" indent="0" marL="0">
+              <a:buNone/>
+            </a:pPr>
+            <a:r>
+              <a:rPr lang="en-US" sz="1400" dirty="0">
+                <a:solidFill>
+                  <a:srgbClr val="0F1419"/>
+                </a:solidFill>
+                <a:latin typeface="Arial" pitchFamily="34" charset="0"/>
+                <a:ea typeface="Arial" pitchFamily="34" charset="-122"/>
+                <a:cs typeface="Arial" pitchFamily="34" charset="-120"/>
+              </a:rPr>
+              <a:t>An on-chain program checks every payment the agent makes. It pays only who you allow, only as much as you allow, and freezes itself when someone tries to trick it.</a:t>
+            </a:r>
+            <a:endParaRPr lang="en-US" sz="1400" dirty="0"/>
+          </a:p>
+        </p:txBody>
+      </p:sp>
+      <p:sp>
+        <p:nvSpPr>
+          <p:cNvPr id="7" name="Shape 5"/>
           <p:cNvSpPr/>
           <p:nvPr/>
         </p:nvSpPr>
         <p:spPr>
           <a:xfrm>
-            <a:off x="548640" y="1097280"/>
-            <a:ext cx="1463040" cy="2103120"/>
+            <a:off x="548640" y="1645920"/>
+            <a:ext cx="1463040" cy="1874520"/>
           </a:xfrm>
           <a:prstGeom prst="roundRect">
             <a:avLst>
@@ -6868,14 +7079,14 @@
       </p:sp>
       <p:sp>
         <p:nvSpPr>
-          <p:cNvPr id="6" name="Shape 4"/>
+          <p:cNvPr id="8" name="Shape 6"/>
           <p:cNvSpPr/>
           <p:nvPr/>
         </p:nvSpPr>
         <p:spPr>
           <a:xfrm>
-            <a:off x="731520" y="1280160"/>
-            <a:ext cx="502920" cy="502920"/>
+            <a:off x="731520" y="1801368"/>
+            <a:ext cx="457200" cy="457200"/>
           </a:xfrm>
           <a:prstGeom prst="ellipse">
             <a:avLst/>
@@ -6888,7 +7099,7 @@
       </p:sp>
       <p:pic>
         <p:nvPicPr>
-          <p:cNvPr id="7" name="Image 0" descr="preencoded.png">    </p:cNvPr>
+          <p:cNvPr id="9" name="Image 0" descr="preencoded.png">    </p:cNvPr>
           <p:cNvPicPr>
             <a:picLocks noChangeAspect="1"/>
           </p:cNvPicPr>
@@ -6902,8 +7113,8 @@
         </p:blipFill>
         <p:spPr>
           <a:xfrm>
-            <a:off x="852221" y="1400861"/>
-            <a:ext cx="261518" cy="261518"/>
+            <a:off x="841248" y="1911096"/>
+            <a:ext cx="237744" cy="237744"/>
           </a:xfrm>
           <a:prstGeom prst="rect">
             <a:avLst/>
@@ -6912,13 +7123,13 @@
       </p:pic>
       <p:sp>
         <p:nvSpPr>
-          <p:cNvPr id="8" name="Text 5"/>
-          <p:cNvSpPr txBox="1"/>
-          <p:nvPr/>
-        </p:nvSpPr>
-        <p:spPr>
-          <a:xfrm>
-            <a:off x="731520" y="1892808"/>
+          <p:cNvPr id="10" name="Text 7"/>
+          <p:cNvSpPr txBox="1"/>
+          <p:nvPr/>
+        </p:nvSpPr>
+        <p:spPr>
+          <a:xfrm>
+            <a:off x="731520" y="2350008"/>
             <a:ext cx="1143000" cy="274320"/>
           </a:xfrm>
           <a:prstGeom prst="rect">
@@ -6951,14 +7162,14 @@
       </p:sp>
       <p:sp>
         <p:nvSpPr>
-          <p:cNvPr id="9" name="Text 6"/>
-          <p:cNvSpPr txBox="1"/>
-          <p:nvPr/>
-        </p:nvSpPr>
-        <p:spPr>
-          <a:xfrm>
-            <a:off x="731520" y="2212848"/>
-            <a:ext cx="1143000" cy="914400"/>
+          <p:cNvPr id="11" name="Text 8"/>
+          <p:cNvSpPr txBox="1"/>
+          <p:nvPr/>
+        </p:nvSpPr>
+        <p:spPr>
+          <a:xfrm>
+            <a:off x="731520" y="2651760"/>
+            <a:ext cx="1143000" cy="822960"/>
           </a:xfrm>
           <a:prstGeom prst="rect">
             <a:avLst/>
@@ -6990,14 +7201,14 @@
       </p:sp>
       <p:sp>
         <p:nvSpPr>
-          <p:cNvPr id="10" name="Shape 7"/>
+          <p:cNvPr id="12" name="Shape 9"/>
           <p:cNvSpPr/>
           <p:nvPr/>
         </p:nvSpPr>
         <p:spPr>
           <a:xfrm>
-            <a:off x="2194560" y="1097280"/>
-            <a:ext cx="1463040" cy="2103120"/>
+            <a:off x="2194560" y="1645920"/>
+            <a:ext cx="1463040" cy="1874520"/>
           </a:xfrm>
           <a:prstGeom prst="roundRect">
             <a:avLst>
@@ -7024,14 +7235,14 @@
       </p:sp>
       <p:sp>
         <p:nvSpPr>
-          <p:cNvPr id="11" name="Shape 8"/>
+          <p:cNvPr id="13" name="Shape 10"/>
           <p:cNvSpPr/>
           <p:nvPr/>
         </p:nvSpPr>
         <p:spPr>
           <a:xfrm>
-            <a:off x="2377440" y="1280160"/>
-            <a:ext cx="502920" cy="502920"/>
+            <a:off x="2377440" y="1801368"/>
+            <a:ext cx="457200" cy="457200"/>
           </a:xfrm>
           <a:prstGeom prst="ellipse">
             <a:avLst/>
@@ -7044,7 +7255,7 @@
       </p:sp>
       <p:pic>
         <p:nvPicPr>
-          <p:cNvPr id="12" name="Image 1" descr="preencoded.png">    </p:cNvPr>
+          <p:cNvPr id="14" name="Image 1" descr="preencoded.png">    </p:cNvPr>
           <p:cNvPicPr>
             <a:picLocks noChangeAspect="1"/>
           </p:cNvPicPr>
@@ -7058,8 +7269,8 @@
         </p:blipFill>
         <p:spPr>
           <a:xfrm>
-            <a:off x="2498141" y="1400861"/>
-            <a:ext cx="261518" cy="261518"/>
+            <a:off x="2487168" y="1911096"/>
+            <a:ext cx="237744" cy="237744"/>
           </a:xfrm>
           <a:prstGeom prst="rect">
             <a:avLst/>
@@ -7068,13 +7279,13 @@
       </p:pic>
       <p:sp>
         <p:nvSpPr>
-          <p:cNvPr id="13" name="Text 9"/>
-          <p:cNvSpPr txBox="1"/>
-          <p:nvPr/>
-        </p:nvSpPr>
-        <p:spPr>
-          <a:xfrm>
-            <a:off x="2377440" y="1892808"/>
+          <p:cNvPr id="15" name="Text 11"/>
+          <p:cNvSpPr txBox="1"/>
+          <p:nvPr/>
+        </p:nvSpPr>
+        <p:spPr>
+          <a:xfrm>
+            <a:off x="2377440" y="2350008"/>
             <a:ext cx="1143000" cy="274320"/>
           </a:xfrm>
           <a:prstGeom prst="rect">
@@ -7107,14 +7318,14 @@
       </p:sp>
       <p:sp>
         <p:nvSpPr>
-          <p:cNvPr id="14" name="Text 10"/>
-          <p:cNvSpPr txBox="1"/>
-          <p:nvPr/>
-        </p:nvSpPr>
-        <p:spPr>
-          <a:xfrm>
-            <a:off x="2377440" y="2212848"/>
-            <a:ext cx="1143000" cy="914400"/>
+          <p:cNvPr id="16" name="Text 12"/>
+          <p:cNvSpPr txBox="1"/>
+          <p:nvPr/>
+        </p:nvSpPr>
+        <p:spPr>
+          <a:xfrm>
+            <a:off x="2377440" y="2651760"/>
+            <a:ext cx="1143000" cy="822960"/>
           </a:xfrm>
           <a:prstGeom prst="rect">
             <a:avLst/>
@@ -7146,14 +7357,14 @@
       </p:sp>
       <p:sp>
         <p:nvSpPr>
-          <p:cNvPr id="15" name="Shape 11"/>
+          <p:cNvPr id="17" name="Shape 13"/>
           <p:cNvSpPr/>
           <p:nvPr/>
         </p:nvSpPr>
         <p:spPr>
           <a:xfrm>
-            <a:off x="3840480" y="1097280"/>
-            <a:ext cx="1463040" cy="2103120"/>
+            <a:off x="3840480" y="1645920"/>
+            <a:ext cx="1463040" cy="1874520"/>
           </a:xfrm>
           <a:prstGeom prst="roundRect">
             <a:avLst>
@@ -7180,14 +7391,14 @@
       </p:sp>
       <p:sp>
         <p:nvSpPr>
-          <p:cNvPr id="16" name="Shape 12"/>
+          <p:cNvPr id="18" name="Shape 14"/>
           <p:cNvSpPr/>
           <p:nvPr/>
         </p:nvSpPr>
         <p:spPr>
           <a:xfrm>
-            <a:off x="4023360" y="1280160"/>
-            <a:ext cx="502920" cy="502920"/>
+            <a:off x="4023360" y="1801368"/>
+            <a:ext cx="457200" cy="457200"/>
           </a:xfrm>
           <a:prstGeom prst="ellipse">
             <a:avLst/>
@@ -7200,7 +7411,7 @@
       </p:sp>
       <p:pic>
         <p:nvPicPr>
-          <p:cNvPr id="17" name="Image 2" descr="preencoded.png">    </p:cNvPr>
+          <p:cNvPr id="19" name="Image 2" descr="preencoded.png">    </p:cNvPr>
           <p:cNvPicPr>
             <a:picLocks noChangeAspect="1"/>
           </p:cNvPicPr>
@@ -7214,8 +7425,8 @@
         </p:blipFill>
         <p:spPr>
           <a:xfrm>
-            <a:off x="4144061" y="1400861"/>
-            <a:ext cx="261518" cy="261518"/>
+            <a:off x="4133088" y="1911096"/>
+            <a:ext cx="237744" cy="237744"/>
           </a:xfrm>
           <a:prstGeom prst="rect">
             <a:avLst/>
@@ -7224,13 +7435,13 @@
       </p:pic>
       <p:sp>
         <p:nvSpPr>
-          <p:cNvPr id="18" name="Text 13"/>
-          <p:cNvSpPr txBox="1"/>
-          <p:nvPr/>
-        </p:nvSpPr>
-        <p:spPr>
-          <a:xfrm>
-            <a:off x="4023360" y="1892808"/>
+          <p:cNvPr id="20" name="Text 15"/>
+          <p:cNvSpPr txBox="1"/>
+          <p:nvPr/>
+        </p:nvSpPr>
+        <p:spPr>
+          <a:xfrm>
+            <a:off x="4023360" y="2350008"/>
             <a:ext cx="1143000" cy="274320"/>
           </a:xfrm>
           <a:prstGeom prst="rect">
@@ -7263,14 +7474,14 @@
       </p:sp>
       <p:sp>
         <p:nvSpPr>
-          <p:cNvPr id="19" name="Text 14"/>
-          <p:cNvSpPr txBox="1"/>
-          <p:nvPr/>
-        </p:nvSpPr>
-        <p:spPr>
-          <a:xfrm>
-            <a:off x="4023360" y="2212848"/>
-            <a:ext cx="1143000" cy="914400"/>
+          <p:cNvPr id="21" name="Text 16"/>
+          <p:cNvSpPr txBox="1"/>
+          <p:nvPr/>
+        </p:nvSpPr>
+        <p:spPr>
+          <a:xfrm>
+            <a:off x="4023360" y="2651760"/>
+            <a:ext cx="1143000" cy="822960"/>
           </a:xfrm>
           <a:prstGeom prst="rect">
             <a:avLst/>
@@ -7302,14 +7513,14 @@
       </p:sp>
       <p:sp>
         <p:nvSpPr>
-          <p:cNvPr id="20" name="Shape 15"/>
+          <p:cNvPr id="22" name="Shape 17"/>
           <p:cNvSpPr/>
           <p:nvPr/>
         </p:nvSpPr>
         <p:spPr>
           <a:xfrm>
-            <a:off x="5486400" y="1097280"/>
-            <a:ext cx="1463040" cy="2103120"/>
+            <a:off x="5486400" y="1645920"/>
+            <a:ext cx="1463040" cy="1874520"/>
           </a:xfrm>
           <a:prstGeom prst="roundRect">
             <a:avLst>
@@ -7336,14 +7547,14 @@
       </p:sp>
       <p:sp>
         <p:nvSpPr>
-          <p:cNvPr id="21" name="Shape 16"/>
+          <p:cNvPr id="23" name="Shape 18"/>
           <p:cNvSpPr/>
           <p:nvPr/>
         </p:nvSpPr>
         <p:spPr>
           <a:xfrm>
-            <a:off x="5669280" y="1280160"/>
-            <a:ext cx="502920" cy="502920"/>
+            <a:off x="5669280" y="1801368"/>
+            <a:ext cx="457200" cy="457200"/>
           </a:xfrm>
           <a:prstGeom prst="ellipse">
             <a:avLst/>
@@ -7356,7 +7567,7 @@
       </p:sp>
       <p:pic>
         <p:nvPicPr>
-          <p:cNvPr id="22" name="Image 3" descr="preencoded.png">    </p:cNvPr>
+          <p:cNvPr id="24" name="Image 3" descr="preencoded.png">    </p:cNvPr>
           <p:cNvPicPr>
             <a:picLocks noChangeAspect="1"/>
           </p:cNvPicPr>
@@ -7370,8 +7581,8 @@
         </p:blipFill>
         <p:spPr>
           <a:xfrm>
-            <a:off x="5789981" y="1400861"/>
-            <a:ext cx="261518" cy="261518"/>
+            <a:off x="5779008" y="1911096"/>
+            <a:ext cx="237744" cy="237744"/>
           </a:xfrm>
           <a:prstGeom prst="rect">
             <a:avLst/>
@@ -7380,13 +7591,13 @@
       </p:pic>
       <p:sp>
         <p:nvSpPr>
-          <p:cNvPr id="23" name="Text 17"/>
-          <p:cNvSpPr txBox="1"/>
-          <p:nvPr/>
-        </p:nvSpPr>
-        <p:spPr>
-          <a:xfrm>
-            <a:off x="5669280" y="1892808"/>
+          <p:cNvPr id="25" name="Text 19"/>
+          <p:cNvSpPr txBox="1"/>
+          <p:nvPr/>
+        </p:nvSpPr>
+        <p:spPr>
+          <a:xfrm>
+            <a:off x="5669280" y="2350008"/>
             <a:ext cx="1143000" cy="274320"/>
           </a:xfrm>
           <a:prstGeom prst="rect">
@@ -7419,14 +7630,14 @@
       </p:sp>
       <p:sp>
         <p:nvSpPr>
-          <p:cNvPr id="24" name="Text 18"/>
-          <p:cNvSpPr txBox="1"/>
-          <p:nvPr/>
-        </p:nvSpPr>
-        <p:spPr>
-          <a:xfrm>
-            <a:off x="5669280" y="2212848"/>
-            <a:ext cx="1143000" cy="914400"/>
+          <p:cNvPr id="26" name="Text 20"/>
+          <p:cNvSpPr txBox="1"/>
+          <p:nvPr/>
+        </p:nvSpPr>
+        <p:spPr>
+          <a:xfrm>
+            <a:off x="5669280" y="2651760"/>
+            <a:ext cx="1143000" cy="822960"/>
           </a:xfrm>
           <a:prstGeom prst="rect">
             <a:avLst/>
@@ -7458,14 +7669,14 @@
       </p:sp>
       <p:sp>
         <p:nvSpPr>
-          <p:cNvPr id="25" name="Shape 19"/>
+          <p:cNvPr id="27" name="Shape 21"/>
           <p:cNvSpPr/>
           <p:nvPr/>
         </p:nvSpPr>
         <p:spPr>
           <a:xfrm>
-            <a:off x="7132320" y="1097280"/>
-            <a:ext cx="1463040" cy="2103120"/>
+            <a:off x="7132320" y="1645920"/>
+            <a:ext cx="1463040" cy="1874520"/>
           </a:xfrm>
           <a:prstGeom prst="roundRect">
             <a:avLst>
@@ -7492,14 +7703,14 @@
       </p:sp>
       <p:sp>
         <p:nvSpPr>
-          <p:cNvPr id="26" name="Shape 20"/>
+          <p:cNvPr id="28" name="Shape 22"/>
           <p:cNvSpPr/>
           <p:nvPr/>
         </p:nvSpPr>
         <p:spPr>
           <a:xfrm>
-            <a:off x="7315200" y="1280160"/>
-            <a:ext cx="502920" cy="502920"/>
+            <a:off x="7315200" y="1801368"/>
+            <a:ext cx="457200" cy="457200"/>
           </a:xfrm>
           <a:prstGeom prst="ellipse">
             <a:avLst/>
@@ -7512,7 +7723,7 @@
       </p:sp>
       <p:pic>
         <p:nvPicPr>
-          <p:cNvPr id="27" name="Image 4" descr="preencoded.png">    </p:cNvPr>
+          <p:cNvPr id="29" name="Image 4" descr="preencoded.png">    </p:cNvPr>
           <p:cNvPicPr>
             <a:picLocks noChangeAspect="1"/>
           </p:cNvPicPr>
@@ -7526,8 +7737,8 @@
         </p:blipFill>
         <p:spPr>
           <a:xfrm>
-            <a:off x="7435901" y="1400861"/>
-            <a:ext cx="261518" cy="261518"/>
+            <a:off x="7424928" y="1911096"/>
+            <a:ext cx="237744" cy="237744"/>
           </a:xfrm>
           <a:prstGeom prst="rect">
             <a:avLst/>
@@ -7536,13 +7747,13 @@
       </p:pic>
       <p:sp>
         <p:nvSpPr>
-          <p:cNvPr id="28" name="Text 21"/>
-          <p:cNvSpPr txBox="1"/>
-          <p:nvPr/>
-        </p:nvSpPr>
-        <p:spPr>
-          <a:xfrm>
-            <a:off x="7315200" y="1892808"/>
+          <p:cNvPr id="30" name="Text 23"/>
+          <p:cNvSpPr txBox="1"/>
+          <p:nvPr/>
+        </p:nvSpPr>
+        <p:spPr>
+          <a:xfrm>
+            <a:off x="7315200" y="2350008"/>
             <a:ext cx="1143000" cy="274320"/>
           </a:xfrm>
           <a:prstGeom prst="rect">
@@ -7575,14 +7786,14 @@
       </p:sp>
       <p:sp>
         <p:nvSpPr>
-          <p:cNvPr id="29" name="Text 22"/>
-          <p:cNvSpPr txBox="1"/>
-          <p:nvPr/>
-        </p:nvSpPr>
-        <p:spPr>
-          <a:xfrm>
-            <a:off x="7315200" y="2212848"/>
-            <a:ext cx="1143000" cy="914400"/>
+          <p:cNvPr id="31" name="Text 24"/>
+          <p:cNvSpPr txBox="1"/>
+          <p:nvPr/>
+        </p:nvSpPr>
+        <p:spPr>
+          <a:xfrm>
+            <a:off x="7315200" y="2651760"/>
+            <a:ext cx="1143000" cy="822960"/>
           </a:xfrm>
           <a:prstGeom prst="rect">
             <a:avLst/>
@@ -7614,13 +7825,13 @@
       </p:sp>
       <p:sp>
         <p:nvSpPr>
-          <p:cNvPr id="30" name="Text 23"/>
-          <p:cNvSpPr txBox="1"/>
-          <p:nvPr/>
-        </p:nvSpPr>
-        <p:spPr>
-          <a:xfrm>
-            <a:off x="548640" y="3429000"/>
+          <p:cNvPr id="32" name="Text 25"/>
+          <p:cNvSpPr txBox="1"/>
+          <p:nvPr/>
+        </p:nvSpPr>
+        <p:spPr>
+          <a:xfrm>
+            <a:off x="548640" y="3703320"/>
             <a:ext cx="8046720" cy="320040"/>
           </a:xfrm>
           <a:prstGeom prst="rect">
@@ -7653,14 +7864,14 @@
       </p:sp>
       <p:sp>
         <p:nvSpPr>
-          <p:cNvPr id="31" name="Text 24"/>
-          <p:cNvSpPr txBox="1"/>
-          <p:nvPr/>
-        </p:nvSpPr>
-        <p:spPr>
-          <a:xfrm>
-            <a:off x="548640" y="3840480"/>
-            <a:ext cx="8046720" cy="548640"/>
+          <p:cNvPr id="33" name="Text 26"/>
+          <p:cNvSpPr txBox="1"/>
+          <p:nvPr/>
+        </p:nvSpPr>
+        <p:spPr>
+          <a:xfrm>
+            <a:off x="548640" y="4069080"/>
+            <a:ext cx="8046720" cy="502920"/>
           </a:xfrm>
           <a:prstGeom prst="rect">
             <a:avLst/>
@@ -7676,7 +7887,7 @@
               <a:buNone/>
             </a:pPr>
             <a:r>
-              <a:rPr lang="en-US" sz="1300" i="1" dirty="0">
+              <a:rPr lang="en-US" sz="1250" i="1" dirty="0">
                 <a:solidFill>
                   <a:srgbClr val="6D28D9"/>
                 </a:solidFill>
@@ -7686,7 +7897,7 @@
               </a:rPr>
               <a:t>Solana's Allowances decide how much an agent may spend. Leash decides who it may pay, how fast, and what happens when it's attacked.</a:t>
             </a:r>
-            <a:endParaRPr lang="en-US" sz="1300" dirty="0"/>
+            <a:endParaRPr lang="en-US" sz="1250" dirty="0"/>
           </a:p>
         </p:txBody>
       </p:sp>
@@ -7808,6 +8019,45 @@
         </p:nvSpPr>
         <p:spPr>
           <a:xfrm>
+            <a:off x="548640" y="219456"/>
+            <a:ext cx="8046720" cy="182880"/>
+          </a:xfrm>
+          <a:prstGeom prst="rect">
+            <a:avLst/>
+          </a:prstGeom>
+          <a:noFill/>
+          <a:ln/>
+        </p:spPr>
+        <p:txBody>
+          <a:bodyPr wrap="square" lIns="0" tIns="0" rIns="0" bIns="0" rtlCol="0" anchor="t"/>
+          <a:lstStyle/>
+          <a:p>
+            <a:pPr algn="l" indent="0" marL="0">
+              <a:buNone/>
+            </a:pPr>
+            <a:r>
+              <a:rPr lang="en-US" sz="1000" b="1" spc="150" kern="0" dirty="0">
+                <a:solidFill>
+                  <a:srgbClr val="6D28D9"/>
+                </a:solidFill>
+                <a:latin typeface="Arial" pitchFamily="34" charset="0"/>
+                <a:ea typeface="Arial" pitchFamily="34" charset="-122"/>
+                <a:cs typeface="Arial" pitchFamily="34" charset="-120"/>
+              </a:rPr>
+              <a:t>HOW IT WORKS ON SOLANA</a:t>
+            </a:r>
+            <a:endParaRPr lang="en-US" sz="1000" dirty="0"/>
+          </a:p>
+        </p:txBody>
+      </p:sp>
+      <p:sp>
+        <p:nvSpPr>
+          <p:cNvPr id="5" name="Text 3"/>
+          <p:cNvSpPr txBox="1"/>
+          <p:nvPr/>
+        </p:nvSpPr>
+        <p:spPr>
+          <a:xfrm>
             <a:off x="548640" y="384048"/>
             <a:ext cx="8046720" cy="548640"/>
           </a:xfrm>
@@ -7833,7 +8083,7 @@
                 <a:ea typeface="Arial" pitchFamily="34" charset="-122"/>
                 <a:cs typeface="Arial" pitchFamily="34" charset="-120"/>
               </a:rPr>
-              <a:t>How it works</a:t>
+              <a:t>Every payment passes the Leash program</a:t>
             </a:r>
             <a:endParaRPr lang="en-US" sz="3000" dirty="0"/>
           </a:p>
@@ -7841,7 +8091,7 @@
       </p:sp>
       <p:sp>
         <p:nvSpPr>
-          <p:cNvPr id="5" name="Shape 3"/>
+          <p:cNvPr id="6" name="Shape 4"/>
           <p:cNvSpPr/>
           <p:nvPr/>
         </p:nvSpPr>
@@ -7875,7 +8125,7 @@
       </p:sp>
       <p:sp>
         <p:nvSpPr>
-          <p:cNvPr id="6" name="Text 4"/>
+          <p:cNvPr id="7" name="Text 5"/>
           <p:cNvSpPr txBox="1"/>
           <p:nvPr/>
         </p:nvSpPr>
@@ -7937,7 +8187,7 @@
       </p:sp>
       <p:sp>
         <p:nvSpPr>
-          <p:cNvPr id="7" name="Shape 5"/>
+          <p:cNvPr id="8" name="Shape 6"/>
           <p:cNvSpPr/>
           <p:nvPr/>
         </p:nvSpPr>
@@ -7961,7 +8211,7 @@
       </p:sp>
       <p:sp>
         <p:nvSpPr>
-          <p:cNvPr id="8" name="Shape 6"/>
+          <p:cNvPr id="9" name="Shape 7"/>
           <p:cNvSpPr/>
           <p:nvPr/>
         </p:nvSpPr>
@@ -7995,7 +8245,7 @@
       </p:sp>
       <p:sp>
         <p:nvSpPr>
-          <p:cNvPr id="9" name="Text 7"/>
+          <p:cNvPr id="10" name="Text 8"/>
           <p:cNvSpPr txBox="1"/>
           <p:nvPr/>
         </p:nvSpPr>
@@ -8057,7 +8307,7 @@
       </p:sp>
       <p:sp>
         <p:nvSpPr>
-          <p:cNvPr id="10" name="Shape 8"/>
+          <p:cNvPr id="11" name="Shape 9"/>
           <p:cNvSpPr/>
           <p:nvPr/>
         </p:nvSpPr>
@@ -8081,7 +8331,7 @@
       </p:sp>
       <p:sp>
         <p:nvSpPr>
-          <p:cNvPr id="11" name="Shape 9"/>
+          <p:cNvPr id="12" name="Shape 10"/>
           <p:cNvSpPr/>
           <p:nvPr/>
         </p:nvSpPr>
@@ -8115,7 +8365,7 @@
       </p:sp>
       <p:sp>
         <p:nvSpPr>
-          <p:cNvPr id="12" name="Text 10"/>
+          <p:cNvPr id="13" name="Text 11"/>
           <p:cNvSpPr txBox="1"/>
           <p:nvPr/>
         </p:nvSpPr>
@@ -8177,7 +8427,7 @@
       </p:sp>
       <p:sp>
         <p:nvSpPr>
-          <p:cNvPr id="13" name="Shape 11"/>
+          <p:cNvPr id="14" name="Shape 12"/>
           <p:cNvSpPr/>
           <p:nvPr/>
         </p:nvSpPr>
@@ -8201,7 +8451,7 @@
       </p:sp>
       <p:sp>
         <p:nvSpPr>
-          <p:cNvPr id="14" name="Shape 12"/>
+          <p:cNvPr id="15" name="Shape 13"/>
           <p:cNvSpPr/>
           <p:nvPr/>
         </p:nvSpPr>
@@ -8230,7 +8480,7 @@
       </p:sp>
       <p:sp>
         <p:nvSpPr>
-          <p:cNvPr id="15" name="Text 13"/>
+          <p:cNvPr id="16" name="Text 14"/>
           <p:cNvSpPr txBox="1"/>
           <p:nvPr/>
         </p:nvSpPr>
@@ -8292,7 +8542,7 @@
       </p:sp>
       <p:sp>
         <p:nvSpPr>
-          <p:cNvPr id="16" name="Shape 14"/>
+          <p:cNvPr id="17" name="Shape 15"/>
           <p:cNvSpPr/>
           <p:nvPr/>
         </p:nvSpPr>
@@ -8316,7 +8566,7 @@
       </p:sp>
       <p:sp>
         <p:nvSpPr>
-          <p:cNvPr id="17" name="Shape 15"/>
+          <p:cNvPr id="18" name="Shape 16"/>
           <p:cNvSpPr/>
           <p:nvPr/>
         </p:nvSpPr>
@@ -8350,7 +8600,7 @@
       </p:sp>
       <p:sp>
         <p:nvSpPr>
-          <p:cNvPr id="18" name="Text 16"/>
+          <p:cNvPr id="19" name="Text 17"/>
           <p:cNvSpPr txBox="1"/>
           <p:nvPr/>
         </p:nvSpPr>
@@ -8412,7 +8662,7 @@
       </p:sp>
       <p:sp>
         <p:nvSpPr>
-          <p:cNvPr id="19" name="Shape 17"/>
+          <p:cNvPr id="20" name="Shape 18"/>
           <p:cNvSpPr/>
           <p:nvPr/>
         </p:nvSpPr>
@@ -8434,7 +8684,7 @@
       </p:sp>
       <p:pic>
         <p:nvPicPr>
-          <p:cNvPr id="20" name="Image 0" descr="preencoded.png">    </p:cNvPr>
+          <p:cNvPr id="21" name="Image 0" descr="preencoded.png">    </p:cNvPr>
           <p:cNvPicPr>
             <a:picLocks noChangeAspect="1"/>
           </p:cNvPicPr>
@@ -8458,7 +8708,7 @@
       </p:pic>
       <p:sp>
         <p:nvSpPr>
-          <p:cNvPr id="21" name="Text 18"/>
+          <p:cNvPr id="22" name="Text 19"/>
           <p:cNvSpPr txBox="1"/>
           <p:nvPr/>
         </p:nvSpPr>
@@ -8511,7 +8761,7 @@
       </p:sp>
       <p:sp>
         <p:nvSpPr>
-          <p:cNvPr id="22" name="Shape 19"/>
+          <p:cNvPr id="23" name="Shape 20"/>
           <p:cNvSpPr/>
           <p:nvPr/>
         </p:nvSpPr>
@@ -8533,7 +8783,7 @@
       </p:sp>
       <p:pic>
         <p:nvPicPr>
-          <p:cNvPr id="23" name="Image 1" descr="preencoded.png">    </p:cNvPr>
+          <p:cNvPr id="24" name="Image 1" descr="preencoded.png">    </p:cNvPr>
           <p:cNvPicPr>
             <a:picLocks noChangeAspect="1"/>
           </p:cNvPicPr>
@@ -8557,7 +8807,7 @@
       </p:pic>
       <p:sp>
         <p:nvSpPr>
-          <p:cNvPr id="24" name="Text 20"/>
+          <p:cNvPr id="25" name="Text 21"/>
           <p:cNvSpPr txBox="1"/>
           <p:nvPr/>
         </p:nvSpPr>
@@ -8610,7 +8860,7 @@
       </p:sp>
       <p:sp>
         <p:nvSpPr>
-          <p:cNvPr id="25" name="Text 21"/>
+          <p:cNvPr id="26" name="Text 22"/>
           <p:cNvSpPr txBox="1"/>
           <p:nvPr/>
         </p:nvSpPr>
@@ -8790,6 +9040,45 @@
         </p:nvSpPr>
         <p:spPr>
           <a:xfrm>
+            <a:off x="548640" y="219456"/>
+            <a:ext cx="8046720" cy="182880"/>
+          </a:xfrm>
+          <a:prstGeom prst="rect">
+            <a:avLst/>
+          </a:prstGeom>
+          <a:noFill/>
+          <a:ln/>
+        </p:spPr>
+        <p:txBody>
+          <a:bodyPr wrap="square" lIns="0" tIns="0" rIns="0" bIns="0" rtlCol="0" anchor="t"/>
+          <a:lstStyle/>
+          <a:p>
+            <a:pPr algn="l" indent="0" marL="0">
+              <a:buNone/>
+            </a:pPr>
+            <a:r>
+              <a:rPr lang="en-US" sz="1000" b="1" spc="150" kern="0" dirty="0">
+                <a:solidFill>
+                  <a:srgbClr val="6D28D9"/>
+                </a:solidFill>
+                <a:latin typeface="Arial" pitchFamily="34" charset="0"/>
+                <a:ea typeface="Arial" pitchFamily="34" charset="-122"/>
+                <a:cs typeface="Arial" pitchFamily="34" charset="-120"/>
+              </a:rPr>
+              <a:t>WORKING PROTOTYPE</a:t>
+            </a:r>
+            <a:endParaRPr lang="en-US" sz="1000" dirty="0"/>
+          </a:p>
+        </p:txBody>
+      </p:sp>
+      <p:sp>
+        <p:nvSpPr>
+          <p:cNvPr id="5" name="Text 3"/>
+          <p:cNvSpPr txBox="1"/>
+          <p:nvPr/>
+        </p:nvSpPr>
+        <p:spPr>
+          <a:xfrm>
             <a:off x="548640" y="384048"/>
             <a:ext cx="8046720" cy="548640"/>
           </a:xfrm>
@@ -8823,7 +9112,7 @@
       </p:sp>
       <p:sp>
         <p:nvSpPr>
-          <p:cNvPr id="5" name="Shape 3"/>
+          <p:cNvPr id="6" name="Shape 4"/>
           <p:cNvSpPr/>
           <p:nvPr/>
         </p:nvSpPr>
@@ -8845,7 +9134,7 @@
       </p:sp>
       <p:sp>
         <p:nvSpPr>
-          <p:cNvPr id="6" name="Text 4"/>
+          <p:cNvPr id="7" name="Text 5"/>
           <p:cNvSpPr txBox="1"/>
           <p:nvPr/>
         </p:nvSpPr>
@@ -8884,7 +9173,7 @@
       </p:sp>
       <p:sp>
         <p:nvSpPr>
-          <p:cNvPr id="7" name="Text 5"/>
+          <p:cNvPr id="8" name="Text 6"/>
           <p:cNvSpPr txBox="1"/>
           <p:nvPr/>
         </p:nvSpPr>
@@ -8923,7 +9212,7 @@
       </p:sp>
       <p:sp>
         <p:nvSpPr>
-          <p:cNvPr id="8" name="Shape 6"/>
+          <p:cNvPr id="9" name="Shape 7"/>
           <p:cNvSpPr/>
           <p:nvPr/>
         </p:nvSpPr>
@@ -8945,7 +9234,7 @@
       </p:sp>
       <p:sp>
         <p:nvSpPr>
-          <p:cNvPr id="9" name="Text 7"/>
+          <p:cNvPr id="10" name="Text 8"/>
           <p:cNvSpPr txBox="1"/>
           <p:nvPr/>
         </p:nvSpPr>
@@ -8984,7 +9273,7 @@
       </p:sp>
       <p:sp>
         <p:nvSpPr>
-          <p:cNvPr id="10" name="Text 8"/>
+          <p:cNvPr id="11" name="Text 9"/>
           <p:cNvSpPr txBox="1"/>
           <p:nvPr/>
         </p:nvSpPr>
@@ -9023,7 +9312,7 @@
       </p:sp>
       <p:sp>
         <p:nvSpPr>
-          <p:cNvPr id="11" name="Shape 9"/>
+          <p:cNvPr id="12" name="Shape 10"/>
           <p:cNvSpPr/>
           <p:nvPr/>
         </p:nvSpPr>
@@ -9045,7 +9334,7 @@
       </p:sp>
       <p:sp>
         <p:nvSpPr>
-          <p:cNvPr id="12" name="Text 10"/>
+          <p:cNvPr id="13" name="Text 11"/>
           <p:cNvSpPr txBox="1"/>
           <p:nvPr/>
         </p:nvSpPr>
@@ -9084,7 +9373,7 @@
       </p:sp>
       <p:sp>
         <p:nvSpPr>
-          <p:cNvPr id="13" name="Text 11"/>
+          <p:cNvPr id="14" name="Text 12"/>
           <p:cNvSpPr txBox="1"/>
           <p:nvPr/>
         </p:nvSpPr>
@@ -9123,7 +9412,7 @@
       </p:sp>
       <p:sp>
         <p:nvSpPr>
-          <p:cNvPr id="14" name="Shape 12"/>
+          <p:cNvPr id="15" name="Shape 13"/>
           <p:cNvSpPr/>
           <p:nvPr/>
         </p:nvSpPr>
@@ -9145,7 +9434,7 @@
       </p:sp>
       <p:sp>
         <p:nvSpPr>
-          <p:cNvPr id="15" name="Text 13"/>
+          <p:cNvPr id="16" name="Text 14"/>
           <p:cNvSpPr txBox="1"/>
           <p:nvPr/>
         </p:nvSpPr>
@@ -9184,7 +9473,7 @@
       </p:sp>
       <p:sp>
         <p:nvSpPr>
-          <p:cNvPr id="16" name="Text 14"/>
+          <p:cNvPr id="17" name="Text 15"/>
           <p:cNvSpPr txBox="1"/>
           <p:nvPr/>
         </p:nvSpPr>
@@ -9223,7 +9512,7 @@
       </p:sp>
       <p:pic>
         <p:nvPicPr>
-          <p:cNvPr id="17" name="Image 0" descr="preencoded.png">    </p:cNvPr>
+          <p:cNvPr id="18" name="Image 0" descr="preencoded.png">    </p:cNvPr>
           <p:cNvPicPr>
             <a:picLocks noChangeAspect="1"/>
           </p:cNvPicPr>
@@ -9247,7 +9536,7 @@
       </p:pic>
       <p:sp>
         <p:nvSpPr>
-          <p:cNvPr id="18" name="Shape 15"/>
+          <p:cNvPr id="19" name="Shape 16"/>
           <p:cNvSpPr/>
           <p:nvPr/>
         </p:nvSpPr>
@@ -9274,7 +9563,7 @@
       </p:sp>
       <p:sp>
         <p:nvSpPr>
-          <p:cNvPr id="19" name="Text 16"/>
+          <p:cNvPr id="20" name="Text 17"/>
           <p:cNvSpPr txBox="1"/>
           <p:nvPr/>
         </p:nvSpPr>
@@ -9313,7 +9602,7 @@
       </p:sp>
       <p:sp>
         <p:nvSpPr>
-          <p:cNvPr id="20" name="Text 17"/>
+          <p:cNvPr id="21" name="Text 18"/>
           <p:cNvSpPr txBox="1"/>
           <p:nvPr/>
         </p:nvSpPr>
@@ -9468,6 +9757,45 @@
         </p:nvSpPr>
         <p:spPr>
           <a:xfrm>
+            <a:off x="548640" y="219456"/>
+            <a:ext cx="8046720" cy="182880"/>
+          </a:xfrm>
+          <a:prstGeom prst="rect">
+            <a:avLst/>
+          </a:prstGeom>
+          <a:noFill/>
+          <a:ln/>
+        </p:spPr>
+        <p:txBody>
+          <a:bodyPr wrap="square" lIns="0" tIns="0" rIns="0" bIns="0" rtlCol="0" anchor="t"/>
+          <a:lstStyle/>
+          <a:p>
+            <a:pPr algn="l" indent="0" marL="0">
+              <a:buNone/>
+            </a:pPr>
+            <a:r>
+              <a:rPr lang="en-US" sz="1000" b="1" spc="150" kern="0" dirty="0">
+                <a:solidFill>
+                  <a:srgbClr val="6D28D9"/>
+                </a:solidFill>
+                <a:latin typeface="Arial" pitchFamily="34" charset="0"/>
+                <a:ea typeface="Arial" pitchFamily="34" charset="-122"/>
+                <a:cs typeface="Arial" pitchFamily="34" charset="-120"/>
+              </a:rPr>
+              <a:t>WHY SOLANA</a:t>
+            </a:r>
+            <a:endParaRPr lang="en-US" sz="1000" dirty="0"/>
+          </a:p>
+        </p:txBody>
+      </p:sp>
+      <p:sp>
+        <p:nvSpPr>
+          <p:cNvPr id="5" name="Text 3"/>
+          <p:cNvSpPr txBox="1"/>
+          <p:nvPr/>
+        </p:nvSpPr>
+        <p:spPr>
+          <a:xfrm>
             <a:off x="548640" y="384048"/>
             <a:ext cx="8046720" cy="548640"/>
           </a:xfrm>
@@ -9493,45 +9821,11 @@
                 <a:ea typeface="Arial" pitchFamily="34" charset="-122"/>
                 <a:cs typeface="Arial" pitchFamily="34" charset="-120"/>
               </a:rPr>
-              <a:t>Why Solana</a:t>
+              <a:t>The rules live where the money is</a:t>
             </a:r>
             <a:endParaRPr lang="en-US" sz="3000" dirty="0"/>
           </a:p>
         </p:txBody>
-      </p:sp>
-      <p:sp>
-        <p:nvSpPr>
-          <p:cNvPr id="5" name="Shape 3"/>
-          <p:cNvSpPr/>
-          <p:nvPr/>
-        </p:nvSpPr>
-        <p:spPr>
-          <a:xfrm>
-            <a:off x="548640" y="1097280"/>
-            <a:ext cx="2560320" cy="2514600"/>
-          </a:xfrm>
-          <a:prstGeom prst="roundRect">
-            <a:avLst>
-              <a:gd name="adj" fmla="val 2909"/>
-            </a:avLst>
-          </a:prstGeom>
-          <a:solidFill>
-            <a:srgbClr val="FFFFFF"/>
-          </a:solidFill>
-          <a:ln w="9525">
-            <a:solidFill>
-              <a:srgbClr val="DFE3EA"/>
-            </a:solidFill>
-            <a:prstDash val="solid"/>
-          </a:ln>
-          <a:effectLst>
-            <a:outerShdw sx="100000" sy="100000" kx="0" ky="0" algn="bl" rotWithShape="0" blurRad="50800" dist="12700" dir="5400000">
-              <a:srgbClr val="000000">
-                <a:alpha val="8000"/>
-              </a:srgbClr>
-            </a:outerShdw>
-          </a:effectLst>
-        </p:spPr>
       </p:sp>
       <p:sp>
         <p:nvSpPr>
@@ -9541,14 +9835,14 @@
         </p:nvSpPr>
         <p:spPr>
           <a:xfrm>
-            <a:off x="777240" y="1298448"/>
-            <a:ext cx="502920" cy="502920"/>
+            <a:off x="548640" y="1088136"/>
+            <a:ext cx="384048" cy="384048"/>
           </a:xfrm>
           <a:prstGeom prst="ellipse">
             <a:avLst/>
           </a:prstGeom>
           <a:solidFill>
-            <a:srgbClr val="F0E9FB"/>
+            <a:srgbClr val="E6F2EE"/>
           </a:solidFill>
           <a:ln/>
         </p:spPr>
@@ -9569,8 +9863,8 @@
         </p:blipFill>
         <p:spPr>
           <a:xfrm>
-            <a:off x="897941" y="1419149"/>
-            <a:ext cx="261518" cy="261518"/>
+            <a:off x="640812" y="1180308"/>
+            <a:ext cx="199705" cy="199705"/>
           </a:xfrm>
           <a:prstGeom prst="rect">
             <a:avLst/>
@@ -9585,24 +9879,24 @@
         </p:nvSpPr>
         <p:spPr>
           <a:xfrm>
-            <a:off x="777240" y="1901952"/>
-            <a:ext cx="2103120" cy="502920"/>
-          </a:xfrm>
-          <a:prstGeom prst="rect">
-            <a:avLst/>
-          </a:prstGeom>
-          <a:noFill/>
-          <a:ln/>
-        </p:spPr>
-        <p:txBody>
-          <a:bodyPr wrap="square" lIns="0" tIns="0" rIns="0" bIns="0" rtlCol="0" anchor="t"/>
-          <a:lstStyle/>
-          <a:p>
-            <a:pPr algn="l" indent="0" marL="0">
-              <a:buNone/>
-            </a:pPr>
-            <a:r>
-              <a:rPr lang="en-US" sz="1500" b="1" dirty="0">
+            <a:off x="1051560" y="1069848"/>
+            <a:ext cx="2240280" cy="420624"/>
+          </a:xfrm>
+          <a:prstGeom prst="rect">
+            <a:avLst/>
+          </a:prstGeom>
+          <a:noFill/>
+          <a:ln/>
+        </p:spPr>
+        <p:txBody>
+          <a:bodyPr wrap="square" lIns="0" tIns="0" rIns="0" bIns="0" rtlCol="0" anchor="ctr"/>
+          <a:lstStyle/>
+          <a:p>
+            <a:pPr algn="l" indent="0" marL="0">
+              <a:buNone/>
+            </a:pPr>
+            <a:r>
+              <a:rPr lang="en-US" sz="1300" b="1" dirty="0">
                 <a:solidFill>
                   <a:srgbClr val="0F1419"/>
                 </a:solidFill>
@@ -9610,9 +9904,9 @@
                 <a:ea typeface="Arial" pitchFamily="34" charset="-122"/>
                 <a:cs typeface="Arial" pitchFamily="34" charset="-120"/>
               </a:rPr>
-              <a:t>Pay per call</a:t>
-            </a:r>
-            <a:endParaRPr lang="en-US" sz="1500" dirty="0"/>
+              <a:t>Allowances program</a:t>
+            </a:r>
+            <a:endParaRPr lang="en-US" sz="1300" dirty="0"/>
           </a:p>
         </p:txBody>
       </p:sp>
@@ -9624,17 +9918,17 @@
         </p:nvSpPr>
         <p:spPr>
           <a:xfrm>
-            <a:off x="777240" y="2487168"/>
-            <a:ext cx="2103120" cy="1051560"/>
-          </a:xfrm>
-          <a:prstGeom prst="rect">
-            <a:avLst/>
-          </a:prstGeom>
-          <a:noFill/>
-          <a:ln/>
-        </p:spPr>
-        <p:txBody>
-          <a:bodyPr wrap="square" lIns="0" tIns="0" rIns="0" bIns="0" rtlCol="0" anchor="t"/>
+            <a:off x="3291840" y="1069848"/>
+            <a:ext cx="5303520" cy="420624"/>
+          </a:xfrm>
+          <a:prstGeom prst="rect">
+            <a:avLst/>
+          </a:prstGeom>
+          <a:noFill/>
+          <a:ln/>
+        </p:spPr>
+        <p:txBody>
+          <a:bodyPr wrap="square" lIns="0" tIns="0" rIns="0" bIns="0" rtlCol="0" anchor="ctr"/>
           <a:lstStyle/>
           <a:p>
             <a:pPr algn="l" indent="0" marL="0">
@@ -9643,13 +9937,13 @@
             <a:r>
               <a:rPr lang="en-US" sz="1150" dirty="0">
                 <a:solidFill>
-                  <a:srgbClr val="535C6B"/>
-                </a:solidFill>
-                <a:latin typeface="Arial" pitchFamily="34" charset="0"/>
-                <a:ea typeface="Arial" pitchFamily="34" charset="-122"/>
-                <a:cs typeface="Arial" pitchFamily="34" charset="-120"/>
-              </a:rPr>
-              <a:t>A 0.01 USDC API call needs sub-cent fees and fast settlement. 76% of x402 agent payments already run on Solana.</a:t>
+                  <a:srgbClr val="0F1419"/>
+                </a:solidFill>
+                <a:latin typeface="Arial" pitchFamily="34" charset="0"/>
+                <a:ea typeface="Arial" pitchFamily="34" charset="-122"/>
+                <a:cs typeface="Arial" pitchFamily="34" charset="-120"/>
+              </a:rPr>
+              <a:t>The Solana Foundation's audited program caps how much the agent can spend. Leash builds on it, so it never holds funds.</a:t>
             </a:r>
             <a:endParaRPr lang="en-US" sz="1150" dirty="0"/>
           </a:p>
@@ -9663,42 +9957,8 @@
         </p:nvSpPr>
         <p:spPr>
           <a:xfrm>
-            <a:off x="3291840" y="1097280"/>
-            <a:ext cx="2560320" cy="2514600"/>
-          </a:xfrm>
-          <a:prstGeom prst="roundRect">
-            <a:avLst>
-              <a:gd name="adj" fmla="val 2909"/>
-            </a:avLst>
-          </a:prstGeom>
-          <a:solidFill>
-            <a:srgbClr val="FFFFFF"/>
-          </a:solidFill>
-          <a:ln w="9525">
-            <a:solidFill>
-              <a:srgbClr val="DFE3EA"/>
-            </a:solidFill>
-            <a:prstDash val="solid"/>
-          </a:ln>
-          <a:effectLst>
-            <a:outerShdw sx="100000" sy="100000" kx="0" ky="0" algn="bl" rotWithShape="0" blurRad="50800" dist="12700" dir="5400000">
-              <a:srgbClr val="000000">
-                <a:alpha val="8000"/>
-              </a:srgbClr>
-            </a:outerShdw>
-          </a:effectLst>
-        </p:spPr>
-      </p:sp>
-      <p:sp>
-        <p:nvSpPr>
-          <p:cNvPr id="11" name="Shape 8"/>
-          <p:cNvSpPr/>
-          <p:nvPr/>
-        </p:nvSpPr>
-        <p:spPr>
-          <a:xfrm>
-            <a:off x="3520440" y="1298448"/>
-            <a:ext cx="502920" cy="502920"/>
+            <a:off x="548640" y="1618488"/>
+            <a:ext cx="384048" cy="384048"/>
           </a:xfrm>
           <a:prstGeom prst="ellipse">
             <a:avLst/>
@@ -9711,7 +9971,7 @@
       </p:sp>
       <p:pic>
         <p:nvPicPr>
-          <p:cNvPr id="12" name="Image 1" descr="preencoded.png">    </p:cNvPr>
+          <p:cNvPr id="11" name="Image 1" descr="preencoded.png">    </p:cNvPr>
           <p:cNvPicPr>
             <a:picLocks noChangeAspect="1"/>
           </p:cNvPicPr>
@@ -9725,8 +9985,8 @@
         </p:blipFill>
         <p:spPr>
           <a:xfrm>
-            <a:off x="3641141" y="1419149"/>
-            <a:ext cx="261518" cy="261518"/>
+            <a:off x="640812" y="1710660"/>
+            <a:ext cx="199705" cy="199705"/>
           </a:xfrm>
           <a:prstGeom prst="rect">
             <a:avLst/>
@@ -9735,30 +9995,69 @@
       </p:pic>
       <p:sp>
         <p:nvSpPr>
+          <p:cNvPr id="12" name="Text 8"/>
+          <p:cNvSpPr txBox="1"/>
+          <p:nvPr/>
+        </p:nvSpPr>
+        <p:spPr>
+          <a:xfrm>
+            <a:off x="1051560" y="1600200"/>
+            <a:ext cx="2240280" cy="420624"/>
+          </a:xfrm>
+          <a:prstGeom prst="rect">
+            <a:avLst/>
+          </a:prstGeom>
+          <a:noFill/>
+          <a:ln/>
+        </p:spPr>
+        <p:txBody>
+          <a:bodyPr wrap="square" lIns="0" tIns="0" rIns="0" bIns="0" rtlCol="0" anchor="ctr"/>
+          <a:lstStyle/>
+          <a:p>
+            <a:pPr algn="l" indent="0" marL="0">
+              <a:buNone/>
+            </a:pPr>
+            <a:r>
+              <a:rPr lang="en-US" sz="1300" b="1" dirty="0">
+                <a:solidFill>
+                  <a:srgbClr val="0F1419"/>
+                </a:solidFill>
+                <a:latin typeface="Arial" pitchFamily="34" charset="0"/>
+                <a:ea typeface="Arial" pitchFamily="34" charset="-122"/>
+                <a:cs typeface="Arial" pitchFamily="34" charset="-120"/>
+              </a:rPr>
+              <a:t>Program-owned accounts</a:t>
+            </a:r>
+            <a:endParaRPr lang="en-US" sz="1300" dirty="0"/>
+          </a:p>
+        </p:txBody>
+      </p:sp>
+      <p:sp>
+        <p:nvSpPr>
           <p:cNvPr id="13" name="Text 9"/>
           <p:cNvSpPr txBox="1"/>
           <p:nvPr/>
         </p:nvSpPr>
         <p:spPr>
           <a:xfrm>
-            <a:off x="3520440" y="1901952"/>
-            <a:ext cx="2103120" cy="502920"/>
-          </a:xfrm>
-          <a:prstGeom prst="rect">
-            <a:avLst/>
-          </a:prstGeom>
-          <a:noFill/>
-          <a:ln/>
-        </p:spPr>
-        <p:txBody>
-          <a:bodyPr wrap="square" lIns="0" tIns="0" rIns="0" bIns="0" rtlCol="0" anchor="t"/>
-          <a:lstStyle/>
-          <a:p>
-            <a:pPr algn="l" indent="0" marL="0">
-              <a:buNone/>
-            </a:pPr>
-            <a:r>
-              <a:rPr lang="en-US" sz="1500" b="1" dirty="0">
+            <a:off x="3291840" y="1600200"/>
+            <a:ext cx="5303520" cy="420624"/>
+          </a:xfrm>
+          <a:prstGeom prst="rect">
+            <a:avLst/>
+          </a:prstGeom>
+          <a:noFill/>
+          <a:ln/>
+        </p:spPr>
+        <p:txBody>
+          <a:bodyPr wrap="square" lIns="0" tIns="0" rIns="0" bIns="0" rtlCol="0" anchor="ctr"/>
+          <a:lstStyle/>
+          <a:p>
+            <a:pPr algn="l" indent="0" marL="0">
+              <a:buNone/>
+            </a:pPr>
+            <a:r>
+              <a:rPr lang="en-US" sz="1150" dirty="0">
                 <a:solidFill>
                   <a:srgbClr val="0F1419"/>
                 </a:solidFill>
@@ -9766,46 +10065,7 @@
                 <a:ea typeface="Arial" pitchFamily="34" charset="-122"/>
                 <a:cs typeface="Arial" pitchFamily="34" charset="-120"/>
               </a:rPr>
-              <a:t>Rules where the money is</a:t>
-            </a:r>
-            <a:endParaRPr lang="en-US" sz="1500" dirty="0"/>
-          </a:p>
-        </p:txBody>
-      </p:sp>
-      <p:sp>
-        <p:nvSpPr>
-          <p:cNvPr id="14" name="Text 10"/>
-          <p:cNvSpPr txBox="1"/>
-          <p:nvPr/>
-        </p:nvSpPr>
-        <p:spPr>
-          <a:xfrm>
-            <a:off x="3520440" y="2487168"/>
-            <a:ext cx="2103120" cy="1051560"/>
-          </a:xfrm>
-          <a:prstGeom prst="rect">
-            <a:avLst/>
-          </a:prstGeom>
-          <a:noFill/>
-          <a:ln/>
-        </p:spPr>
-        <p:txBody>
-          <a:bodyPr wrap="square" lIns="0" tIns="0" rIns="0" bIns="0" rtlCol="0" anchor="t"/>
-          <a:lstStyle/>
-          <a:p>
-            <a:pPr algn="l" indent="0" marL="0">
-              <a:buNone/>
-            </a:pPr>
-            <a:r>
-              <a:rPr lang="en-US" sz="1150" dirty="0">
-                <a:solidFill>
-                  <a:srgbClr val="535C6B"/>
-                </a:solidFill>
-                <a:latin typeface="Arial" pitchFamily="34" charset="0"/>
-                <a:ea typeface="Arial" pitchFamily="34" charset="-122"/>
-                <a:cs typeface="Arial" pitchFamily="34" charset="-120"/>
-              </a:rPr>
-              <a:t>No prompt can change on-chain rules, and a freeze applies to everyone from the next slot.</a:t>
+              <a:t>The allowance belongs to the agent's Leash account, which only the program signs for, after every check. The agent's key alone can't move money.</a:t>
             </a:r>
             <a:endParaRPr lang="en-US" sz="1150" dirty="0"/>
           </a:p>
@@ -9813,61 +10073,27 @@
       </p:sp>
       <p:sp>
         <p:nvSpPr>
-          <p:cNvPr id="15" name="Shape 11"/>
+          <p:cNvPr id="14" name="Shape 10"/>
           <p:cNvSpPr/>
           <p:nvPr/>
         </p:nvSpPr>
         <p:spPr>
           <a:xfrm>
-            <a:off x="6035040" y="1097280"/>
-            <a:ext cx="2560320" cy="2514600"/>
-          </a:xfrm>
-          <a:prstGeom prst="roundRect">
-            <a:avLst>
-              <a:gd name="adj" fmla="val 2909"/>
-            </a:avLst>
+            <a:off x="548640" y="2148840"/>
+            <a:ext cx="384048" cy="384048"/>
+          </a:xfrm>
+          <a:prstGeom prst="ellipse">
+            <a:avLst/>
           </a:prstGeom>
           <a:solidFill>
-            <a:srgbClr val="FFFFFF"/>
-          </a:solidFill>
-          <a:ln w="9525">
-            <a:solidFill>
-              <a:srgbClr val="DFE3EA"/>
-            </a:solidFill>
-            <a:prstDash val="solid"/>
-          </a:ln>
-          <a:effectLst>
-            <a:outerShdw sx="100000" sy="100000" kx="0" ky="0" algn="bl" rotWithShape="0" blurRad="50800" dist="12700" dir="5400000">
-              <a:srgbClr val="000000">
-                <a:alpha val="8000"/>
-              </a:srgbClr>
-            </a:outerShdw>
-          </a:effectLst>
-        </p:spPr>
-      </p:sp>
-      <p:sp>
-        <p:nvSpPr>
-          <p:cNvPr id="16" name="Shape 12"/>
-          <p:cNvSpPr/>
-          <p:nvPr/>
-        </p:nvSpPr>
-        <p:spPr>
-          <a:xfrm>
-            <a:off x="6263640" y="1298448"/>
-            <a:ext cx="502920" cy="502920"/>
-          </a:xfrm>
-          <a:prstGeom prst="ellipse">
-            <a:avLst/>
-          </a:prstGeom>
-          <a:solidFill>
-            <a:srgbClr val="E6F2EE"/>
+            <a:srgbClr val="F0E9FB"/>
           </a:solidFill>
           <a:ln/>
         </p:spPr>
       </p:sp>
       <p:pic>
         <p:nvPicPr>
-          <p:cNvPr id="17" name="Image 2" descr="preencoded.png">    </p:cNvPr>
+          <p:cNvPr id="15" name="Image 2" descr="preencoded.png">    </p:cNvPr>
           <p:cNvPicPr>
             <a:picLocks noChangeAspect="1"/>
           </p:cNvPicPr>
@@ -9881,8 +10107,8 @@
         </p:blipFill>
         <p:spPr>
           <a:xfrm>
-            <a:off x="6384341" y="1419149"/>
-            <a:ext cx="261518" cy="261518"/>
+            <a:off x="640812" y="2241012"/>
+            <a:ext cx="199705" cy="199705"/>
           </a:xfrm>
           <a:prstGeom prst="rect">
             <a:avLst/>
@@ -9891,14 +10117,336 @@
       </p:pic>
       <p:sp>
         <p:nvSpPr>
-          <p:cNvPr id="18" name="Text 13"/>
-          <p:cNvSpPr txBox="1"/>
-          <p:nvPr/>
-        </p:nvSpPr>
-        <p:spPr>
-          <a:xfrm>
-            <a:off x="6263640" y="1901952"/>
-            <a:ext cx="2103120" cy="502920"/>
+          <p:cNvPr id="16" name="Text 11"/>
+          <p:cNvSpPr txBox="1"/>
+          <p:nvPr/>
+        </p:nvSpPr>
+        <p:spPr>
+          <a:xfrm>
+            <a:off x="1051560" y="2130552"/>
+            <a:ext cx="2240280" cy="420624"/>
+          </a:xfrm>
+          <a:prstGeom prst="rect">
+            <a:avLst/>
+          </a:prstGeom>
+          <a:noFill/>
+          <a:ln/>
+        </p:spPr>
+        <p:txBody>
+          <a:bodyPr wrap="square" lIns="0" tIns="0" rIns="0" bIns="0" rtlCol="0" anchor="ctr"/>
+          <a:lstStyle/>
+          <a:p>
+            <a:pPr algn="l" indent="0" marL="0">
+              <a:buNone/>
+            </a:pPr>
+            <a:r>
+              <a:rPr lang="en-US" sz="1300" b="1" dirty="0">
+                <a:solidFill>
+                  <a:srgbClr val="0F1419"/>
+                </a:solidFill>
+                <a:latin typeface="Arial" pitchFamily="34" charset="0"/>
+                <a:ea typeface="Arial" pitchFamily="34" charset="-122"/>
+                <a:cs typeface="Arial" pitchFamily="34" charset="-120"/>
+              </a:rPr>
+              <a:t>USDC over x402</a:t>
+            </a:r>
+            <a:endParaRPr lang="en-US" sz="1300" dirty="0"/>
+          </a:p>
+        </p:txBody>
+      </p:sp>
+      <p:sp>
+        <p:nvSpPr>
+          <p:cNvPr id="17" name="Text 12"/>
+          <p:cNvSpPr txBox="1"/>
+          <p:nvPr/>
+        </p:nvSpPr>
+        <p:spPr>
+          <a:xfrm>
+            <a:off x="3291840" y="2130552"/>
+            <a:ext cx="5303520" cy="420624"/>
+          </a:xfrm>
+          <a:prstGeom prst="rect">
+            <a:avLst/>
+          </a:prstGeom>
+          <a:noFill/>
+          <a:ln/>
+        </p:spPr>
+        <p:txBody>
+          <a:bodyPr wrap="square" lIns="0" tIns="0" rIns="0" bIns="0" rtlCol="0" anchor="ctr"/>
+          <a:lstStyle/>
+          <a:p>
+            <a:pPr algn="l" indent="0" marL="0">
+              <a:buNone/>
+            </a:pPr>
+            <a:r>
+              <a:rPr lang="en-US" sz="1150" dirty="0">
+                <a:solidFill>
+                  <a:srgbClr val="0F1419"/>
+                </a:solidFill>
+                <a:latin typeface="Arial" pitchFamily="34" charset="0"/>
+                <a:ea typeface="Arial" pitchFamily="34" charset="-122"/>
+                <a:cs typeface="Arial" pitchFamily="34" charset="-120"/>
+              </a:rPr>
+              <a:t>76% of x402 agent payments already run on Solana. Sub-cent fees make a 0.01 USDC API call worth paying.</a:t>
+            </a:r>
+            <a:endParaRPr lang="en-US" sz="1150" dirty="0"/>
+          </a:p>
+        </p:txBody>
+      </p:sp>
+      <p:sp>
+        <p:nvSpPr>
+          <p:cNvPr id="18" name="Shape 13"/>
+          <p:cNvSpPr/>
+          <p:nvPr/>
+        </p:nvSpPr>
+        <p:spPr>
+          <a:xfrm>
+            <a:off x="548640" y="2679192"/>
+            <a:ext cx="384048" cy="384048"/>
+          </a:xfrm>
+          <a:prstGeom prst="ellipse">
+            <a:avLst/>
+          </a:prstGeom>
+          <a:solidFill>
+            <a:srgbClr val="F8EEE6"/>
+          </a:solidFill>
+          <a:ln/>
+        </p:spPr>
+      </p:sp>
+      <p:pic>
+        <p:nvPicPr>
+          <p:cNvPr id="19" name="Image 3" descr="preencoded.png">    </p:cNvPr>
+          <p:cNvPicPr>
+            <a:picLocks noChangeAspect="1"/>
+          </p:cNvPicPr>
+          <p:nvPr/>
+        </p:nvPicPr>
+        <p:blipFill>
+          <a:blip r:embed="rId4"/>
+          <a:stretch>
+            <a:fillRect/>
+          </a:stretch>
+        </p:blipFill>
+        <p:spPr>
+          <a:xfrm>
+            <a:off x="640812" y="2771364"/>
+            <a:ext cx="199705" cy="199705"/>
+          </a:xfrm>
+          <a:prstGeom prst="rect">
+            <a:avLst/>
+          </a:prstGeom>
+        </p:spPr>
+      </p:pic>
+      <p:sp>
+        <p:nvSpPr>
+          <p:cNvPr id="20" name="Text 14"/>
+          <p:cNvSpPr txBox="1"/>
+          <p:nvPr/>
+        </p:nvSpPr>
+        <p:spPr>
+          <a:xfrm>
+            <a:off x="1051560" y="2660904"/>
+            <a:ext cx="2240280" cy="420624"/>
+          </a:xfrm>
+          <a:prstGeom prst="rect">
+            <a:avLst/>
+          </a:prstGeom>
+          <a:noFill/>
+          <a:ln/>
+        </p:spPr>
+        <p:txBody>
+          <a:bodyPr wrap="square" lIns="0" tIns="0" rIns="0" bIns="0" rtlCol="0" anchor="ctr"/>
+          <a:lstStyle/>
+          <a:p>
+            <a:pPr algn="l" indent="0" marL="0">
+              <a:buNone/>
+            </a:pPr>
+            <a:r>
+              <a:rPr lang="en-US" sz="1300" b="1" dirty="0">
+                <a:solidFill>
+                  <a:srgbClr val="0F1419"/>
+                </a:solidFill>
+                <a:latin typeface="Arial" pitchFamily="34" charset="0"/>
+                <a:ea typeface="Arial" pitchFamily="34" charset="-122"/>
+                <a:cs typeface="Arial" pitchFamily="34" charset="-120"/>
+              </a:rPr>
+              <a:t>Sub-second slots</a:t>
+            </a:r>
+            <a:endParaRPr lang="en-US" sz="1300" dirty="0"/>
+          </a:p>
+        </p:txBody>
+      </p:sp>
+      <p:sp>
+        <p:nvSpPr>
+          <p:cNvPr id="21" name="Text 15"/>
+          <p:cNvSpPr txBox="1"/>
+          <p:nvPr/>
+        </p:nvSpPr>
+        <p:spPr>
+          <a:xfrm>
+            <a:off x="3291840" y="2660904"/>
+            <a:ext cx="5303520" cy="420624"/>
+          </a:xfrm>
+          <a:prstGeom prst="rect">
+            <a:avLst/>
+          </a:prstGeom>
+          <a:noFill/>
+          <a:ln/>
+        </p:spPr>
+        <p:txBody>
+          <a:bodyPr wrap="square" lIns="0" tIns="0" rIns="0" bIns="0" rtlCol="0" anchor="ctr"/>
+          <a:lstStyle/>
+          <a:p>
+            <a:pPr algn="l" indent="0" marL="0">
+              <a:buNone/>
+            </a:pPr>
+            <a:r>
+              <a:rPr lang="en-US" sz="1150" dirty="0">
+                <a:solidFill>
+                  <a:srgbClr val="0F1419"/>
+                </a:solidFill>
+                <a:latin typeface="Arial" pitchFamily="34" charset="0"/>
+                <a:ea typeface="Arial" pitchFamily="34" charset="-122"/>
+                <a:cs typeface="Arial" pitchFamily="34" charset="-120"/>
+              </a:rPr>
+              <a:t>A freeze stops every payment from the next slot, about 0.4 s later, and every block is an on-chain event.</a:t>
+            </a:r>
+            <a:endParaRPr lang="en-US" sz="1150" dirty="0"/>
+          </a:p>
+        </p:txBody>
+      </p:sp>
+      <p:sp>
+        <p:nvSpPr>
+          <p:cNvPr id="22" name="Shape 16"/>
+          <p:cNvSpPr/>
+          <p:nvPr/>
+        </p:nvSpPr>
+        <p:spPr>
+          <a:xfrm>
+            <a:off x="548640" y="3209544"/>
+            <a:ext cx="384048" cy="384048"/>
+          </a:xfrm>
+          <a:prstGeom prst="ellipse">
+            <a:avLst/>
+          </a:prstGeom>
+          <a:solidFill>
+            <a:srgbClr val="E8EDFB"/>
+          </a:solidFill>
+          <a:ln/>
+        </p:spPr>
+      </p:sp>
+      <p:pic>
+        <p:nvPicPr>
+          <p:cNvPr id="23" name="Image 4" descr="preencoded.png">    </p:cNvPr>
+          <p:cNvPicPr>
+            <a:picLocks noChangeAspect="1"/>
+          </p:cNvPicPr>
+          <p:nvPr/>
+        </p:nvPicPr>
+        <p:blipFill>
+          <a:blip r:embed="rId5"/>
+          <a:stretch>
+            <a:fillRect/>
+          </a:stretch>
+        </p:blipFill>
+        <p:spPr>
+          <a:xfrm>
+            <a:off x="640812" y="3301716"/>
+            <a:ext cx="199705" cy="199705"/>
+          </a:xfrm>
+          <a:prstGeom prst="rect">
+            <a:avLst/>
+          </a:prstGeom>
+        </p:spPr>
+      </p:pic>
+      <p:sp>
+        <p:nvSpPr>
+          <p:cNvPr id="24" name="Text 17"/>
+          <p:cNvSpPr txBox="1"/>
+          <p:nvPr/>
+        </p:nvSpPr>
+        <p:spPr>
+          <a:xfrm>
+            <a:off x="1051560" y="3191256"/>
+            <a:ext cx="2240280" cy="420624"/>
+          </a:xfrm>
+          <a:prstGeom prst="rect">
+            <a:avLst/>
+          </a:prstGeom>
+          <a:noFill/>
+          <a:ln/>
+        </p:spPr>
+        <p:txBody>
+          <a:bodyPr wrap="square" lIns="0" tIns="0" rIns="0" bIns="0" rtlCol="0" anchor="ctr"/>
+          <a:lstStyle/>
+          <a:p>
+            <a:pPr algn="l" indent="0" marL="0">
+              <a:buNone/>
+            </a:pPr>
+            <a:r>
+              <a:rPr lang="en-US" sz="1300" b="1" dirty="0">
+                <a:solidFill>
+                  <a:srgbClr val="0F1419"/>
+                </a:solidFill>
+                <a:latin typeface="Arial" pitchFamily="34" charset="0"/>
+                <a:ea typeface="Arial" pitchFamily="34" charset="-122"/>
+                <a:cs typeface="Arial" pitchFamily="34" charset="-120"/>
+              </a:rPr>
+              <a:t>Solana Actions (Blinks)</a:t>
+            </a:r>
+            <a:endParaRPr lang="en-US" sz="1300" dirty="0"/>
+          </a:p>
+        </p:txBody>
+      </p:sp>
+      <p:sp>
+        <p:nvSpPr>
+          <p:cNvPr id="25" name="Text 18"/>
+          <p:cNvSpPr txBox="1"/>
+          <p:nvPr/>
+        </p:nvSpPr>
+        <p:spPr>
+          <a:xfrm>
+            <a:off x="3291840" y="3191256"/>
+            <a:ext cx="5303520" cy="420624"/>
+          </a:xfrm>
+          <a:prstGeom prst="rect">
+            <a:avLst/>
+          </a:prstGeom>
+          <a:noFill/>
+          <a:ln/>
+        </p:spPr>
+        <p:txBody>
+          <a:bodyPr wrap="square" lIns="0" tIns="0" rIns="0" bIns="0" rtlCol="0" anchor="ctr"/>
+          <a:lstStyle/>
+          <a:p>
+            <a:pPr algn="l" indent="0" marL="0">
+              <a:buNone/>
+            </a:pPr>
+            <a:r>
+              <a:rPr lang="en-US" sz="1150" dirty="0">
+                <a:solidFill>
+                  <a:srgbClr val="0F1419"/>
+                </a:solidFill>
+                <a:latin typeface="Arial" pitchFamily="34" charset="0"/>
+                <a:ea typeface="Arial" pitchFamily="34" charset="-122"/>
+                <a:cs typeface="Arial" pitchFamily="34" charset="-120"/>
+              </a:rPr>
+              <a:t>The owner approves a payment or freezes an agent from a link in a chat; the wallet signs.</a:t>
+            </a:r>
+            <a:endParaRPr lang="en-US" sz="1150" dirty="0"/>
+          </a:p>
+        </p:txBody>
+      </p:sp>
+      <p:sp>
+        <p:nvSpPr>
+          <p:cNvPr id="26" name="Text 19"/>
+          <p:cNvSpPr txBox="1"/>
+          <p:nvPr/>
+        </p:nvSpPr>
+        <p:spPr>
+          <a:xfrm>
+            <a:off x="548640" y="3886200"/>
+            <a:ext cx="8046720" cy="548640"/>
           </a:xfrm>
           <a:prstGeom prst="rect">
             <a:avLst/>
@@ -9914,87 +10462,9 @@
               <a:buNone/>
             </a:pPr>
             <a:r>
-              <a:rPr lang="en-US" sz="1500" b="1" dirty="0">
-                <a:solidFill>
-                  <a:srgbClr val="0F1419"/>
-                </a:solidFill>
-                <a:latin typeface="Arial" pitchFamily="34" charset="0"/>
-                <a:ea typeface="Arial" pitchFamily="34" charset="-122"/>
-                <a:cs typeface="Arial" pitchFamily="34" charset="-120"/>
-              </a:rPr>
-              <a:t>Built from Solana's parts</a:t>
-            </a:r>
-            <a:endParaRPr lang="en-US" sz="1500" dirty="0"/>
-          </a:p>
-        </p:txBody>
-      </p:sp>
-      <p:sp>
-        <p:nvSpPr>
-          <p:cNvPr id="19" name="Text 14"/>
-          <p:cNvSpPr txBox="1"/>
-          <p:nvPr/>
-        </p:nvSpPr>
-        <p:spPr>
-          <a:xfrm>
-            <a:off x="6263640" y="2487168"/>
-            <a:ext cx="2103120" cy="1051560"/>
-          </a:xfrm>
-          <a:prstGeom prst="rect">
-            <a:avLst/>
-          </a:prstGeom>
-          <a:noFill/>
-          <a:ln/>
-        </p:spPr>
-        <p:txBody>
-          <a:bodyPr wrap="square" lIns="0" tIns="0" rIns="0" bIns="0" rtlCol="0" anchor="t"/>
-          <a:lstStyle/>
-          <a:p>
-            <a:pPr algn="l" indent="0" marL="0">
-              <a:buNone/>
-            </a:pPr>
-            <a:r>
-              <a:rPr lang="en-US" sz="1150" dirty="0">
-                <a:solidFill>
-                  <a:srgbClr val="535C6B"/>
-                </a:solidFill>
-                <a:latin typeface="Arial" pitchFamily="34" charset="0"/>
-                <a:ea typeface="Arial" pitchFamily="34" charset="-122"/>
-                <a:cs typeface="Arial" pitchFamily="34" charset="-120"/>
-              </a:rPr>
-              <a:t>The Foundation's audited Allowances program is the hard ceiling, x402 carries the payment, and Leash adds the rules in between.</a:t>
-            </a:r>
-            <a:endParaRPr lang="en-US" sz="1150" dirty="0"/>
-          </a:p>
-        </p:txBody>
-      </p:sp>
-      <p:sp>
-        <p:nvSpPr>
-          <p:cNvPr id="20" name="Text 15"/>
-          <p:cNvSpPr txBox="1"/>
-          <p:nvPr/>
-        </p:nvSpPr>
-        <p:spPr>
-          <a:xfrm>
-            <a:off x="548640" y="3840480"/>
-            <a:ext cx="8046720" cy="548640"/>
-          </a:xfrm>
-          <a:prstGeom prst="rect">
-            <a:avLst/>
-          </a:prstGeom>
-          <a:noFill/>
-          <a:ln/>
-        </p:spPr>
-        <p:txBody>
-          <a:bodyPr wrap="square" lIns="0" tIns="0" rIns="0" bIns="0" rtlCol="0" anchor="t"/>
-          <a:lstStyle/>
-          <a:p>
-            <a:pPr algn="l" indent="0" marL="0">
-              <a:buNone/>
-            </a:pPr>
-            <a:r>
               <a:rPr lang="en-US" sz="1400" b="1" dirty="0">
                 <a:solidFill>
-                  <a:srgbClr val="0F1419"/>
+                  <a:srgbClr val="6D28D9"/>
                 </a:solidFill>
                 <a:latin typeface="Arial" pitchFamily="34" charset="0"/>
                 <a:ea typeface="Arial" pitchFamily="34" charset="-122"/>
@@ -10124,6 +10594,45 @@
         </p:nvSpPr>
         <p:spPr>
           <a:xfrm>
+            <a:off x="548640" y="219456"/>
+            <a:ext cx="8046720" cy="182880"/>
+          </a:xfrm>
+          <a:prstGeom prst="rect">
+            <a:avLst/>
+          </a:prstGeom>
+          <a:noFill/>
+          <a:ln/>
+        </p:spPr>
+        <p:txBody>
+          <a:bodyPr wrap="square" lIns="0" tIns="0" rIns="0" bIns="0" rtlCol="0" anchor="t"/>
+          <a:lstStyle/>
+          <a:p>
+            <a:pPr algn="l" indent="0" marL="0">
+              <a:buNone/>
+            </a:pPr>
+            <a:r>
+              <a:rPr lang="en-US" sz="1000" b="1" spc="150" kern="0" dirty="0">
+                <a:solidFill>
+                  <a:srgbClr val="6D28D9"/>
+                </a:solidFill>
+                <a:latin typeface="Arial" pitchFamily="34" charset="0"/>
+                <a:ea typeface="Arial" pitchFamily="34" charset="-122"/>
+                <a:cs typeface="Arial" pitchFamily="34" charset="-120"/>
+              </a:rPr>
+              <a:t>SAFETY</a:t>
+            </a:r>
+            <a:endParaRPr lang="en-US" sz="1000" dirty="0"/>
+          </a:p>
+        </p:txBody>
+      </p:sp>
+      <p:sp>
+        <p:nvSpPr>
+          <p:cNvPr id="5" name="Text 3"/>
+          <p:cNvSpPr txBox="1"/>
+          <p:nvPr/>
+        </p:nvSpPr>
+        <p:spPr>
+          <a:xfrm>
             <a:off x="548640" y="384048"/>
             <a:ext cx="8046720" cy="548640"/>
           </a:xfrm>
@@ -10157,7 +10666,7 @@
       </p:sp>
       <p:sp>
         <p:nvSpPr>
-          <p:cNvPr id="5" name="Shape 3"/>
+          <p:cNvPr id="6" name="Shape 4"/>
           <p:cNvSpPr/>
           <p:nvPr/>
         </p:nvSpPr>
@@ -10179,7 +10688,7 @@
       </p:sp>
       <p:sp>
         <p:nvSpPr>
-          <p:cNvPr id="6" name="Text 4"/>
+          <p:cNvPr id="7" name="Text 5"/>
           <p:cNvSpPr txBox="1"/>
           <p:nvPr/>
         </p:nvSpPr>
@@ -10218,7 +10727,7 @@
       </p:sp>
       <p:sp>
         <p:nvSpPr>
-          <p:cNvPr id="7" name="Text 5"/>
+          <p:cNvPr id="8" name="Text 6"/>
           <p:cNvSpPr txBox="1"/>
           <p:nvPr/>
         </p:nvSpPr>
@@ -10257,7 +10766,7 @@
       </p:sp>
       <p:sp>
         <p:nvSpPr>
-          <p:cNvPr id="8" name="Text 6"/>
+          <p:cNvPr id="9" name="Text 7"/>
           <p:cNvSpPr txBox="1"/>
           <p:nvPr/>
         </p:nvSpPr>
@@ -10363,7 +10872,7 @@
       </p:sp>
       <p:pic>
         <p:nvPicPr>
-          <p:cNvPr id="9" name="Image 0" descr="preencoded.png">    </p:cNvPr>
+          <p:cNvPr id="10" name="Image 0" descr="preencoded.png">    </p:cNvPr>
           <p:cNvPicPr>
             <a:picLocks noChangeAspect="1"/>
           </p:cNvPicPr>
@@ -10387,7 +10896,7 @@
       </p:pic>
       <p:sp>
         <p:nvSpPr>
-          <p:cNvPr id="10" name="Shape 7"/>
+          <p:cNvPr id="11" name="Shape 8"/>
           <p:cNvSpPr/>
           <p:nvPr/>
         </p:nvSpPr>
@@ -10414,7 +10923,7 @@
       </p:sp>
       <p:sp>
         <p:nvSpPr>
-          <p:cNvPr id="11" name="Text 8"/>
+          <p:cNvPr id="12" name="Text 9"/>
           <p:cNvSpPr txBox="1"/>
           <p:nvPr/>
         </p:nvSpPr>
@@ -10453,7 +10962,7 @@
       </p:sp>
       <p:sp>
         <p:nvSpPr>
-          <p:cNvPr id="12" name="Shape 9"/>
+          <p:cNvPr id="13" name="Shape 10"/>
           <p:cNvSpPr/>
           <p:nvPr/>
         </p:nvSpPr>
@@ -10487,7 +10996,7 @@
       </p:sp>
       <p:sp>
         <p:nvSpPr>
-          <p:cNvPr id="13" name="Shape 10"/>
+          <p:cNvPr id="14" name="Shape 11"/>
           <p:cNvSpPr/>
           <p:nvPr/>
         </p:nvSpPr>
@@ -10507,7 +11016,7 @@
       </p:sp>
       <p:pic>
         <p:nvPicPr>
-          <p:cNvPr id="14" name="Image 1" descr="preencoded.png">    </p:cNvPr>
+          <p:cNvPr id="15" name="Image 1" descr="preencoded.png">    </p:cNvPr>
           <p:cNvPicPr>
             <a:picLocks noChangeAspect="1"/>
           </p:cNvPicPr>
@@ -10531,7 +11040,7 @@
       </p:pic>
       <p:sp>
         <p:nvSpPr>
-          <p:cNvPr id="15" name="Text 11"/>
+          <p:cNvPr id="16" name="Text 12"/>
           <p:cNvSpPr txBox="1"/>
           <p:nvPr/>
         </p:nvSpPr>
@@ -10570,7 +11079,7 @@
       </p:sp>
       <p:sp>
         <p:nvSpPr>
-          <p:cNvPr id="16" name="Text 12"/>
+          <p:cNvPr id="17" name="Text 13"/>
           <p:cNvSpPr txBox="1"/>
           <p:nvPr/>
         </p:nvSpPr>
@@ -10771,6 +11280,45 @@
         </p:nvSpPr>
         <p:spPr>
           <a:xfrm>
+            <a:off x="548640" y="219456"/>
+            <a:ext cx="8046720" cy="182880"/>
+          </a:xfrm>
+          <a:prstGeom prst="rect">
+            <a:avLst/>
+          </a:prstGeom>
+          <a:noFill/>
+          <a:ln/>
+        </p:spPr>
+        <p:txBody>
+          <a:bodyPr wrap="square" lIns="0" tIns="0" rIns="0" bIns="0" rtlCol="0" anchor="t"/>
+          <a:lstStyle/>
+          <a:p>
+            <a:pPr algn="l" indent="0" marL="0">
+              <a:buNone/>
+            </a:pPr>
+            <a:r>
+              <a:rPr lang="en-US" sz="1000" b="1" spc="150" kern="0" dirty="0">
+                <a:solidFill>
+                  <a:srgbClr val="6D28D9"/>
+                </a:solidFill>
+                <a:latin typeface="Arial" pitchFamily="34" charset="0"/>
+                <a:ea typeface="Arial" pitchFamily="34" charset="-122"/>
+                <a:cs typeface="Arial" pitchFamily="34" charset="-120"/>
+              </a:rPr>
+              <a:t>WORKING PROTOTYPE</a:t>
+            </a:r>
+            <a:endParaRPr lang="en-US" sz="1000" dirty="0"/>
+          </a:p>
+        </p:txBody>
+      </p:sp>
+      <p:sp>
+        <p:nvSpPr>
+          <p:cNvPr id="5" name="Text 3"/>
+          <p:cNvSpPr txBox="1"/>
+          <p:nvPr/>
+        </p:nvSpPr>
+        <p:spPr>
+          <a:xfrm>
             <a:off x="548640" y="384048"/>
             <a:ext cx="8046720" cy="548640"/>
           </a:xfrm>
@@ -10804,7 +11352,7 @@
       </p:sp>
       <p:sp>
         <p:nvSpPr>
-          <p:cNvPr id="5" name="Shape 3"/>
+          <p:cNvPr id="6" name="Shape 4"/>
           <p:cNvSpPr/>
           <p:nvPr/>
         </p:nvSpPr>
@@ -10826,7 +11374,7 @@
       </p:sp>
       <p:pic>
         <p:nvPicPr>
-          <p:cNvPr id="6" name="Image 0" descr="preencoded.png">    </p:cNvPr>
+          <p:cNvPr id="7" name="Image 0" descr="preencoded.png">    </p:cNvPr>
           <p:cNvPicPr>
             <a:picLocks noChangeAspect="1"/>
           </p:cNvPicPr>
@@ -10850,7 +11398,7 @@
       </p:pic>
       <p:sp>
         <p:nvSpPr>
-          <p:cNvPr id="7" name="Text 4"/>
+          <p:cNvPr id="8" name="Text 5"/>
           <p:cNvSpPr txBox="1"/>
           <p:nvPr/>
         </p:nvSpPr>
@@ -10889,7 +11437,7 @@
       </p:sp>
       <p:pic>
         <p:nvPicPr>
-          <p:cNvPr id="8" name="Image 1" descr="preencoded.png">    </p:cNvPr>
+          <p:cNvPr id="9" name="Image 1" descr="preencoded.png">    </p:cNvPr>
           <p:cNvPicPr>
             <a:picLocks noChangeAspect="1"/>
           </p:cNvPicPr>
@@ -10913,7 +11461,7 @@
       </p:pic>
       <p:sp>
         <p:nvSpPr>
-          <p:cNvPr id="9" name="Text 5"/>
+          <p:cNvPr id="10" name="Text 6"/>
           <p:cNvSpPr txBox="1"/>
           <p:nvPr/>
         </p:nvSpPr>
@@ -10952,7 +11500,7 @@
       </p:sp>
       <p:pic>
         <p:nvPicPr>
-          <p:cNvPr id="10" name="Image 2" descr="preencoded.png">    </p:cNvPr>
+          <p:cNvPr id="11" name="Image 2" descr="preencoded.png">    </p:cNvPr>
           <p:cNvPicPr>
             <a:picLocks noChangeAspect="1"/>
           </p:cNvPicPr>
@@ -10976,7 +11524,7 @@
       </p:pic>
       <p:sp>
         <p:nvSpPr>
-          <p:cNvPr id="11" name="Text 6"/>
+          <p:cNvPr id="12" name="Text 7"/>
           <p:cNvSpPr txBox="1"/>
           <p:nvPr/>
         </p:nvSpPr>
@@ -11015,7 +11563,7 @@
       </p:sp>
       <p:pic>
         <p:nvPicPr>
-          <p:cNvPr id="12" name="Image 3" descr="preencoded.png">    </p:cNvPr>
+          <p:cNvPr id="13" name="Image 3" descr="preencoded.png">    </p:cNvPr>
           <p:cNvPicPr>
             <a:picLocks noChangeAspect="1"/>
           </p:cNvPicPr>
@@ -11039,7 +11587,7 @@
       </p:pic>
       <p:sp>
         <p:nvSpPr>
-          <p:cNvPr id="13" name="Text 7"/>
+          <p:cNvPr id="14" name="Text 8"/>
           <p:cNvSpPr txBox="1"/>
           <p:nvPr/>
         </p:nvSpPr>
@@ -11078,7 +11626,7 @@
       </p:sp>
       <p:pic>
         <p:nvPicPr>
-          <p:cNvPr id="14" name="Image 4" descr="preencoded.png">    </p:cNvPr>
+          <p:cNvPr id="15" name="Image 4" descr="preencoded.png">    </p:cNvPr>
           <p:cNvPicPr>
             <a:picLocks noChangeAspect="1"/>
           </p:cNvPicPr>
@@ -11102,7 +11650,7 @@
       </p:pic>
       <p:sp>
         <p:nvSpPr>
-          <p:cNvPr id="15" name="Text 8"/>
+          <p:cNvPr id="16" name="Text 9"/>
           <p:cNvSpPr txBox="1"/>
           <p:nvPr/>
         </p:nvSpPr>
@@ -11141,7 +11689,7 @@
       </p:sp>
       <p:pic>
         <p:nvPicPr>
-          <p:cNvPr id="16" name="Image 5" descr="preencoded.png">    </p:cNvPr>
+          <p:cNvPr id="17" name="Image 5" descr="preencoded.png">    </p:cNvPr>
           <p:cNvPicPr>
             <a:picLocks noChangeAspect="1"/>
           </p:cNvPicPr>
@@ -11165,7 +11713,7 @@
       </p:pic>
       <p:sp>
         <p:nvSpPr>
-          <p:cNvPr id="17" name="Text 9"/>
+          <p:cNvPr id="18" name="Text 10"/>
           <p:cNvSpPr txBox="1"/>
           <p:nvPr/>
         </p:nvSpPr>
@@ -11204,7 +11752,7 @@
       </p:sp>
       <p:pic>
         <p:nvPicPr>
-          <p:cNvPr id="18" name="Image 6" descr="preencoded.png">    </p:cNvPr>
+          <p:cNvPr id="19" name="Image 6" descr="preencoded.png">    </p:cNvPr>
           <p:cNvPicPr>
             <a:picLocks noChangeAspect="1"/>
           </p:cNvPicPr>
@@ -11228,7 +11776,7 @@
       </p:pic>
       <p:sp>
         <p:nvSpPr>
-          <p:cNvPr id="19" name="Text 10"/>
+          <p:cNvPr id="20" name="Text 11"/>
           <p:cNvSpPr txBox="1"/>
           <p:nvPr/>
         </p:nvSpPr>
@@ -11267,7 +11815,7 @@
       </p:sp>
       <p:pic>
         <p:nvPicPr>
-          <p:cNvPr id="20" name="Image 7" descr="preencoded.png">    </p:cNvPr>
+          <p:cNvPr id="21" name="Image 7" descr="preencoded.png">    </p:cNvPr>
           <p:cNvPicPr>
             <a:picLocks noChangeAspect="1"/>
           </p:cNvPicPr>
@@ -11291,7 +11839,7 @@
       </p:pic>
       <p:sp>
         <p:nvSpPr>
-          <p:cNvPr id="21" name="Text 11"/>
+          <p:cNvPr id="22" name="Text 12"/>
           <p:cNvSpPr txBox="1"/>
           <p:nvPr/>
         </p:nvSpPr>
@@ -11330,7 +11878,7 @@
       </p:sp>
       <p:pic>
         <p:nvPicPr>
-          <p:cNvPr id="22" name="Image 8" descr="preencoded.png">    </p:cNvPr>
+          <p:cNvPr id="23" name="Image 8" descr="preencoded.png">    </p:cNvPr>
           <p:cNvPicPr>
             <a:picLocks noChangeAspect="1"/>
           </p:cNvPicPr>
@@ -11354,7 +11902,7 @@
       </p:pic>
       <p:sp>
         <p:nvSpPr>
-          <p:cNvPr id="23" name="Text 12"/>
+          <p:cNvPr id="24" name="Text 13"/>
           <p:cNvSpPr txBox="1"/>
           <p:nvPr/>
         </p:nvSpPr>
@@ -11393,7 +11941,7 @@
       </p:sp>
       <p:pic>
         <p:nvPicPr>
-          <p:cNvPr id="24" name="Image 9" descr="preencoded.png">    </p:cNvPr>
+          <p:cNvPr id="25" name="Image 9" descr="preencoded.png">    </p:cNvPr>
           <p:cNvPicPr>
             <a:picLocks noChangeAspect="1"/>
           </p:cNvPicPr>
@@ -11417,7 +11965,7 @@
       </p:pic>
       <p:sp>
         <p:nvSpPr>
-          <p:cNvPr id="25" name="Text 13"/>
+          <p:cNvPr id="26" name="Text 14"/>
           <p:cNvSpPr txBox="1"/>
           <p:nvPr/>
         </p:nvSpPr>
@@ -11456,7 +12004,7 @@
       </p:sp>
       <p:pic>
         <p:nvPicPr>
-          <p:cNvPr id="26" name="Image 10" descr="preencoded.png">    </p:cNvPr>
+          <p:cNvPr id="27" name="Image 10" descr="preencoded.png">    </p:cNvPr>
           <p:cNvPicPr>
             <a:picLocks noChangeAspect="1"/>
           </p:cNvPicPr>
@@ -11480,7 +12028,7 @@
       </p:pic>
       <p:sp>
         <p:nvSpPr>
-          <p:cNvPr id="27" name="Text 14"/>
+          <p:cNvPr id="28" name="Text 15"/>
           <p:cNvSpPr txBox="1"/>
           <p:nvPr/>
         </p:nvSpPr>
@@ -11519,7 +12067,7 @@
       </p:sp>
       <p:sp>
         <p:nvSpPr>
-          <p:cNvPr id="28" name="Shape 15"/>
+          <p:cNvPr id="29" name="Shape 16"/>
           <p:cNvSpPr/>
           <p:nvPr/>
         </p:nvSpPr>
@@ -11541,7 +12089,7 @@
       </p:sp>
       <p:pic>
         <p:nvPicPr>
-          <p:cNvPr id="29" name="Image 11" descr="preencoded.png">    </p:cNvPr>
+          <p:cNvPr id="30" name="Image 11" descr="preencoded.png">    </p:cNvPr>
           <p:cNvPicPr>
             <a:picLocks noChangeAspect="1"/>
           </p:cNvPicPr>
@@ -11565,7 +12113,7 @@
       </p:pic>
       <p:sp>
         <p:nvSpPr>
-          <p:cNvPr id="30" name="Text 16"/>
+          <p:cNvPr id="31" name="Text 17"/>
           <p:cNvSpPr txBox="1"/>
           <p:nvPr/>
         </p:nvSpPr>
@@ -11604,7 +12152,7 @@
       </p:sp>
       <p:pic>
         <p:nvPicPr>
-          <p:cNvPr id="31" name="Image 12" descr="preencoded.png">    </p:cNvPr>
+          <p:cNvPr id="32" name="Image 12" descr="preencoded.png">    </p:cNvPr>
           <p:cNvPicPr>
             <a:picLocks noChangeAspect="1"/>
           </p:cNvPicPr>
@@ -11628,7 +12176,7 @@
       </p:pic>
       <p:sp>
         <p:nvSpPr>
-          <p:cNvPr id="32" name="Text 17"/>
+          <p:cNvPr id="33" name="Text 18"/>
           <p:cNvSpPr txBox="1"/>
           <p:nvPr/>
         </p:nvSpPr>
@@ -11667,7 +12215,7 @@
       </p:sp>
       <p:sp>
         <p:nvSpPr>
-          <p:cNvPr id="33" name="Shape 18"/>
+          <p:cNvPr id="34" name="Shape 19"/>
           <p:cNvSpPr/>
           <p:nvPr/>
         </p:nvSpPr>
@@ -11701,7 +12249,7 @@
       </p:sp>
       <p:sp>
         <p:nvSpPr>
-          <p:cNvPr id="34" name="Text 19"/>
+          <p:cNvPr id="35" name="Text 20"/>
           <p:cNvSpPr txBox="1"/>
           <p:nvPr/>
         </p:nvSpPr>
@@ -11740,7 +12288,7 @@
       </p:sp>
       <p:sp>
         <p:nvSpPr>
-          <p:cNvPr id="35" name="Text 20"/>
+          <p:cNvPr id="36" name="Text 21"/>
           <p:cNvSpPr txBox="1"/>
           <p:nvPr/>
         </p:nvSpPr>
@@ -11779,7 +12327,7 @@
       </p:sp>
       <p:sp>
         <p:nvSpPr>
-          <p:cNvPr id="36" name="Text 21"/>
+          <p:cNvPr id="37" name="Text 22"/>
           <p:cNvSpPr txBox="1"/>
           <p:nvPr/>
         </p:nvSpPr>

--- a/docs/pitch/leash-deck.pptx
+++ b/docs/pitch/leash-deck.pptx
@@ -5174,45 +5174,6 @@
           </a:p>
         </p:txBody>
       </p:sp>
-      <p:sp>
-        <p:nvSpPr>
-          <p:cNvPr id="13" name="Text 8"/>
-          <p:cNvSpPr txBox="1"/>
-          <p:nvPr/>
-        </p:nvSpPr>
-        <p:spPr>
-          <a:xfrm>
-            <a:off x="548640" y="4434840"/>
-            <a:ext cx="8046720" cy="228600"/>
-          </a:xfrm>
-          <a:prstGeom prst="rect">
-            <a:avLst/>
-          </a:prstGeom>
-          <a:noFill/>
-          <a:ln/>
-        </p:spPr>
-        <p:txBody>
-          <a:bodyPr wrap="square" lIns="0" tIns="0" rIns="0" bIns="0" rtlCol="0" anchor="t"/>
-          <a:lstStyle/>
-          <a:p>
-            <a:pPr algn="ctr" indent="0" marL="0">
-              <a:buNone/>
-            </a:pPr>
-            <a:r>
-              <a:rPr lang="en-US" sz="900" dirty="0">
-                <a:solidFill>
-                  <a:srgbClr val="535C6B"/>
-                </a:solidFill>
-                <a:latin typeface="Arial" pitchFamily="34" charset="0"/>
-                <a:ea typeface="Arial" pitchFamily="34" charset="-122"/>
-                <a:cs typeface="Arial" pitchFamily="34" charset="-120"/>
-              </a:rPr>
-              <a:t>Built with parallel Claude Code sessions, each owning one part of the architecture.</a:t>
-            </a:r>
-            <a:endParaRPr lang="en-US" sz="900" dirty="0"/>
-          </a:p>
-        </p:txBody>
-      </p:sp>
     </p:spTree>
   </p:cSld>
   <p:clrMapOvr>
